--- a/slides/pptx/week15.pptx
+++ b/slides/pptx/week15.pptx
@@ -780,7 +780,7 @@
           <a:p>
             <a:r>
               <a:rPr lang="en-US" dirty="0"/>
-              <a:t>The capstone game. Both roles teach: Blue learns to configure gates, Red learns where gates have blind spots. Run it as live PRs against the pipeline. Weekly quiz Q6 asks for one gate they added + what it blocks. ~3 min.</a:t>
+              <a:t>The capstone game. Both roles teach: Blue learns to configure gates, Red learns where gates have blind spots — but Red's menu is fixed to 3 attacks that actually map to a gate, not open-ended. Run it as live PRs against the pipeline. Weekly quiz Q6 asks for one gate they added + what it blocks + their personal flag — don't drop the flag half, it's graded too. ~3 min.</a:t>
             </a:r>
             <a:endParaRPr lang="en-US" dirty="0"/>
           </a:p>
@@ -868,7 +868,7 @@
           <a:p>
             <a:r>
               <a:rPr lang="en-US" dirty="0"/>
-              <a:t>The "build failing" screenshot is the proof the gate actually blocks — a green pipeline that never fails is useless. AI-resilient tasks count. This is also the last weekly quiz.</a:t>
+              <a:t>Two separate targets this week, both graded: security-ci.yml is the CI gate; insecure_service.py/secure_service.py (compose, :8090/:8091) is where the personal flag lives. The "build failing" screenshots are the proof the gate actually blocks — a green pipeline that never fails is useless, and one category alone undersells the deliverable. AI-resilient tasks count. This is also the last weekly quiz.</a:t>
             </a:r>
             <a:endParaRPr lang="en-US" dirty="0"/>
           </a:p>
@@ -1308,7 +1308,7 @@
           <a:p>
             <a:r>
               <a:rPr lang="en-US" dirty="0"/>
-              <a:t>The worked example — this is the lab's actual pipeline. Three scanners, each catching a class we studied. The KEY line is "fail build on HIGH/CRITICAL": a gate that only warns gets ignored. SARIF feeds findings into the Security tab. ~6 min.</a:t>
+              <a:t>The worked example — this is the lab's actual pipeline. Be precise: Trivy's active jobs are fs (SCA) and config (IaC) — the image-scan step exists in the YAML but is commented out/optional, don't claim it's active. The "runs twice" pattern (report step + separate gate step) is what Part 2 Q1 is built around — say it explicitly. The KEY line is "fail build on HIGH/CRITICAL": a gate that only warns gets ignored. ~6 min.</a:t>
             </a:r>
             <a:endParaRPr lang="en-US" dirty="0"/>
           </a:p>
@@ -1484,7 +1484,7 @@
           <a:p>
             <a:r>
               <a:rPr lang="en-US" dirty="0"/>
-              <a:t>Shift from prevention to detection. A09 (logging/monitoring failures) is a Top 10 risk because you can't respond to what you can't see. Recall W6: we read attacker actions FROM logs — but only if they were logged. ~4 min.</a:t>
+              <a:t>Shift from prevention to detection. A09 (logging/monitoring failures) is a Top 10 risk because you can't respond to what you can't see. The CWE-532 point is graded (Part 2 Q4) and easy to skip if you only say "log security events" — a log line that captures the bad token has just created a new secrets-in-logs problem. Recall W6: we read attacker actions FROM logs — but only if they were logged. ~4 min.</a:t>
             </a:r>
             <a:endParaRPr lang="en-US" dirty="0"/>
           </a:p>
@@ -2434,7 +2434,9 @@
           <a:ln/>
         </p:spPr>
         <p:txBody>
-          <a:bodyPr wrap="square" lIns="0" tIns="0" rIns="0" bIns="0" rtlCol="0" anchor="t"/>
+          <a:bodyPr wrap="square" lIns="0" tIns="0" rIns="0" bIns="0" rtlCol="0" anchor="t">
+            <a:normAutofit/>
+          </a:bodyPr>
           <a:lstStyle/>
           <a:p>
             <a:pPr marL="342900" indent="-342900">
@@ -2733,7 +2735,9 @@
           <a:ln/>
         </p:spPr>
         <p:txBody>
-          <a:bodyPr wrap="square" lIns="0" tIns="0" rIns="0" bIns="0" rtlCol="0" anchor="t"/>
+          <a:bodyPr wrap="square" lIns="0" tIns="0" rIns="0" bIns="0" rtlCol="0" anchor="t">
+            <a:normAutofit/>
+          </a:bodyPr>
           <a:lstStyle/>
           <a:p>
             <a:pPr marL="342900" indent="-342900">
@@ -2994,11 +2998,11 @@
         <p:spPr>
           <a:xfrm>
             <a:off x="457200" y="1325880"/>
-            <a:ext cx="8229600" cy="1207008"/>
+            <a:ext cx="8229600" cy="2011680"/>
           </a:xfrm>
           <a:prstGeom prst="roundRect">
             <a:avLst>
-              <a:gd name="adj" fmla="val 6061"/>
+              <a:gd name="adj" fmla="val 3636"/>
             </a:avLst>
           </a:prstGeom>
           <a:solidFill>
@@ -3023,7 +3027,7 @@
         <p:spPr>
           <a:xfrm>
             <a:off x="731520" y="1435608"/>
-            <a:ext cx="7680960" cy="987552"/>
+            <a:ext cx="7680960" cy="1792224"/>
           </a:xfrm>
           <a:prstGeom prst="rect">
             <a:avLst/>
@@ -3032,7 +3036,9 @@
           <a:ln/>
         </p:spPr>
         <p:txBody>
-          <a:bodyPr wrap="square" lIns="0" tIns="0" rIns="0" bIns="0" rtlCol="0" anchor="t"/>
+          <a:bodyPr wrap="square" lIns="0" tIns="0" rIns="0" bIns="0" rtlCol="0" anchor="t">
+            <a:normAutofit/>
+          </a:bodyPr>
           <a:lstStyle/>
           <a:p>
             <a:pPr marL="342900" indent="-342900">
@@ -3072,7 +3078,7 @@
                 <a:ea typeface="Calibri" pitchFamily="34" charset="-122"/>
                 <a:cs typeface="Calibri" pitchFamily="34" charset="-120"/>
               </a:rPr>
-              <a:t>Red: submit PRs sneaking in a vuln/secret</a:t>
+              <a:t>Red: three gate-mapped attacks only — outdated dependency (Trivy SCA), a Dockerfile running as root (Trivy config), a hardcoded token (Gitleaks). chmod 777 and FROM:latest are decoys that stay green — not gate bypasses</a:t>
             </a:r>
             <a:endParaRPr lang="en-US" sz="1400" dirty="0"/>
           </a:p>
@@ -3093,7 +3099,7 @@
                 <a:ea typeface="Calibri" pitchFamily="34" charset="-122"/>
                 <a:cs typeface="Calibri" pitchFamily="34" charset="-120"/>
               </a:rPr>
-              <a:t>Score: Blue per catch, Red per bypass</a:t>
+              <a:t>Score: Blue per catch, Red per successful bypass; then capture your personal flag from the fail-open /admin bypass in insecure_service.py</a:t>
             </a:r>
             <a:endParaRPr lang="en-US" sz="1400" dirty="0"/>
           </a:p>
@@ -3293,11 +3299,11 @@
         <p:spPr>
           <a:xfrm>
             <a:off x="457200" y="1325880"/>
-            <a:ext cx="8229600" cy="822960"/>
+            <a:ext cx="8229600" cy="1097280"/>
           </a:xfrm>
           <a:prstGeom prst="roundRect">
             <a:avLst>
-              <a:gd name="adj" fmla="val 8889"/>
+              <a:gd name="adj" fmla="val 6667"/>
             </a:avLst>
           </a:prstGeom>
           <a:solidFill>
@@ -3315,7 +3321,7 @@
         <p:spPr>
           <a:xfrm>
             <a:off x="731520" y="1325880"/>
-            <a:ext cx="7680960" cy="822960"/>
+            <a:ext cx="7680960" cy="1097280"/>
           </a:xfrm>
           <a:prstGeom prst="rect">
             <a:avLst/>
@@ -3324,7 +3330,9 @@
           <a:ln/>
         </p:spPr>
         <p:txBody>
-          <a:bodyPr wrap="square" lIns="0" tIns="0" rIns="0" bIns="0" rtlCol="0" anchor="ctr"/>
+          <a:bodyPr wrap="square" lIns="0" tIns="0" rIns="0" bIns="0" rtlCol="0" anchor="ctr">
+            <a:normAutofit/>
+          </a:bodyPr>
           <a:lstStyle/>
           <a:p>
             <a:pPr indent="0" marL="0">
@@ -3339,7 +3347,7 @@
                 <a:ea typeface="Calibri" pitchFamily="34" charset="-122"/>
                 <a:cs typeface="Calibri" pitchFamily="34" charset="-120"/>
               </a:rPr>
-              <a:t>📋 Worksheet 15 — labs/week15-devsecops-pipeline/worksheet.md (Part 3) · kickoff: push security-ci.yml → GitHub Actions (· python sample-service.py)</a:t>
+              <a:t>📋 Worksheet 15 — labs/week15-devsecops-pipeline/worksheet.md (Part 3) · kickoff: push security-ci.yml → GitHub Actions; separately, docker compose up → :8090 (insecure) / :8091 (secure) for the flag task</a:t>
             </a:r>
             <a:endParaRPr lang="en-US" sz="1400" dirty="0"/>
           </a:p>
@@ -3353,12 +3361,12 @@
         </p:nvSpPr>
         <p:spPr>
           <a:xfrm>
-            <a:off x="457200" y="2313432"/>
-            <a:ext cx="8229600" cy="1207008"/>
+            <a:off x="457200" y="2587752"/>
+            <a:ext cx="8229600" cy="1920240"/>
           </a:xfrm>
           <a:prstGeom prst="roundRect">
             <a:avLst>
-              <a:gd name="adj" fmla="val 6061"/>
+              <a:gd name="adj" fmla="val 3810"/>
             </a:avLst>
           </a:prstGeom>
           <a:solidFill>
@@ -3382,8 +3390,8 @@
         </p:nvSpPr>
         <p:spPr>
           <a:xfrm>
-            <a:off x="731520" y="2423160"/>
-            <a:ext cx="7680960" cy="987552"/>
+            <a:off x="731520" y="2697480"/>
+            <a:ext cx="7680960" cy="1700784"/>
           </a:xfrm>
           <a:prstGeom prst="rect">
             <a:avLst/>
@@ -3392,7 +3400,9 @@
           <a:ln/>
         </p:spPr>
         <p:txBody>
-          <a:bodyPr wrap="square" lIns="0" tIns="0" rIns="0" bIns="0" rtlCol="0" anchor="t"/>
+          <a:bodyPr wrap="square" lIns="0" tIns="0" rIns="0" bIns="0" rtlCol="0" anchor="t">
+            <a:normAutofit/>
+          </a:bodyPr>
           <a:lstStyle/>
           <a:p>
             <a:pPr marL="342900" indent="-342900">
@@ -3432,7 +3442,28 @@
                 <a:ea typeface="Calibri" pitchFamily="34" charset="-122"/>
                 <a:cs typeface="Calibri" pitchFamily="34" charset="-120"/>
               </a:rPr>
-              <a:t>Screenshot: build failing on an injected vulnerable dependency</a:t>
+              <a:t>Screenshot: build failing on each of the 3 Red-team categories (dependency, root Dockerfile, hardcoded token) — not just one</a:t>
+            </a:r>
+            <a:endParaRPr lang="en-US" sz="1400" dirty="0"/>
+          </a:p>
+          <a:p>
+            <a:pPr marL="342900" indent="-342900">
+              <a:spcAft>
+                <a:spcPts val="600"/>
+              </a:spcAft>
+              <a:buSzPct val="100000"/>
+              <a:buChar char="•"/>
+            </a:pPr>
+            <a:r>
+              <a:rPr lang="en-US" sz="1400" dirty="0">
+                <a:solidFill>
+                  <a:srgbClr val="1F2937"/>
+                </a:solidFill>
+                <a:latin typeface="Calibri" pitchFamily="34" charset="0"/>
+                <a:ea typeface="Calibri" pitchFamily="34" charset="-122"/>
+                <a:cs typeface="Calibri" pitchFamily="34" charset="-120"/>
+              </a:rPr>
+              <a:t>Your personal FLAG{...} from the fail-open /admin bypass, submitted with this week's quiz Q6</a:t>
             </a:r>
             <a:endParaRPr lang="en-US" sz="1400" dirty="0"/>
           </a:p>
@@ -3691,7 +3722,9 @@
           <a:ln/>
         </p:spPr>
         <p:txBody>
-          <a:bodyPr wrap="square" lIns="0" tIns="0" rIns="0" bIns="0" rtlCol="0" anchor="t"/>
+          <a:bodyPr wrap="square" lIns="0" tIns="0" rIns="0" bIns="0" rtlCol="0" anchor="t">
+            <a:normAutofit/>
+          </a:bodyPr>
           <a:lstStyle/>
           <a:p>
             <a:pPr marL="342900" indent="-342900">
@@ -4124,7 +4157,9 @@
           <a:ln/>
         </p:spPr>
         <p:txBody>
-          <a:bodyPr wrap="square" lIns="0" tIns="0" rIns="0" bIns="0" rtlCol="0" anchor="t"/>
+          <a:bodyPr wrap="square" lIns="0" tIns="0" rIns="0" bIns="0" rtlCol="0" anchor="t">
+            <a:normAutofit/>
+          </a:bodyPr>
           <a:lstStyle/>
           <a:p>
             <a:pPr marL="342900" indent="-342900">
@@ -4465,7 +4500,9 @@
           <a:ln/>
         </p:spPr>
         <p:txBody>
-          <a:bodyPr wrap="square" lIns="0" tIns="0" rIns="0" bIns="0" rtlCol="0" anchor="t"/>
+          <a:bodyPr wrap="square" lIns="0" tIns="0" rIns="0" bIns="0" rtlCol="0" anchor="t">
+            <a:normAutofit/>
+          </a:bodyPr>
           <a:lstStyle/>
           <a:p>
             <a:pPr marL="342900" indent="-342900">
@@ -4726,11 +4763,11 @@
         <p:spPr>
           <a:xfrm>
             <a:off x="457200" y="1325880"/>
-            <a:ext cx="8229600" cy="1554480"/>
+            <a:ext cx="8229600" cy="1371600"/>
           </a:xfrm>
           <a:prstGeom prst="roundRect">
             <a:avLst>
-              <a:gd name="adj" fmla="val 3529"/>
+              <a:gd name="adj" fmla="val 4000"/>
             </a:avLst>
           </a:prstGeom>
           <a:solidFill>
@@ -4753,7 +4790,7 @@
         <p:spPr>
           <a:xfrm>
             <a:off x="640080" y="1399032"/>
-            <a:ext cx="7863840" cy="1408176"/>
+            <a:ext cx="7863840" cy="1225296"/>
           </a:xfrm>
           <a:prstGeom prst="rect">
             <a:avLst/>
@@ -4762,7 +4799,9 @@
           <a:ln/>
         </p:spPr>
         <p:txBody>
-          <a:bodyPr wrap="square" lIns="0" tIns="0" rIns="0" bIns="0" rtlCol="0" anchor="t"/>
+          <a:bodyPr wrap="square" lIns="0" tIns="0" rIns="0" bIns="0" rtlCol="0" anchor="t">
+            <a:normAutofit/>
+          </a:bodyPr>
           <a:lstStyle/>
           <a:p>
             <a:pPr indent="0" marL="0">
@@ -4811,7 +4850,7 @@
                 <a:ea typeface="Courier New" pitchFamily="34" charset="-122"/>
                 <a:cs typeface="Courier New" pitchFamily="34" charset="-120"/>
               </a:rPr>
-              <a:t>- trivy     # SCA + image + IaC</a:t>
+              <a:t>- trivy     # SCA (fs) + IaC (config) — image scan is optional, off by default</a:t>
             </a:r>
             <a:endParaRPr lang="en-US" sz="1150" dirty="0"/>
           </a:p>
@@ -4828,7 +4867,7 @@
                 <a:ea typeface="Courier New" pitchFamily="34" charset="-122"/>
                 <a:cs typeface="Courier New" pitchFamily="34" charset="-120"/>
               </a:rPr>
-              <a:t>- gitleaks  # secrets</a:t>
+              <a:t>- gitleaks  # secrets + git history</a:t>
             </a:r>
             <a:endParaRPr lang="en-US" sz="1150" dirty="0"/>
           </a:p>
@@ -4845,7 +4884,7 @@
                 <a:ea typeface="Courier New" pitchFamily="34" charset="-122"/>
                 <a:cs typeface="Courier New" pitchFamily="34" charset="-120"/>
               </a:rPr>
-              <a:t># fail build on HIGH/CRITICAL</a:t>
+              <a:t># each tool runs TWICE: once to report (SARIF, always), once to gate (fails the build)</a:t>
             </a:r>
             <a:endParaRPr lang="en-US" sz="1150" dirty="0"/>
           </a:p>
@@ -4859,12 +4898,12 @@
         </p:nvSpPr>
         <p:spPr>
           <a:xfrm>
-            <a:off x="457200" y="3044952"/>
-            <a:ext cx="8229600" cy="585216"/>
+            <a:off x="457200" y="2862072"/>
+            <a:ext cx="8229600" cy="1097280"/>
           </a:xfrm>
           <a:prstGeom prst="roundRect">
             <a:avLst>
-              <a:gd name="adj" fmla="val 12500"/>
+              <a:gd name="adj" fmla="val 6667"/>
             </a:avLst>
           </a:prstGeom>
           <a:solidFill>
@@ -4888,8 +4927,8 @@
         </p:nvSpPr>
         <p:spPr>
           <a:xfrm>
-            <a:off x="731520" y="3154680"/>
-            <a:ext cx="7680960" cy="365760"/>
+            <a:off x="731520" y="2971800"/>
+            <a:ext cx="7680960" cy="877824"/>
           </a:xfrm>
           <a:prstGeom prst="rect">
             <a:avLst/>
@@ -4898,8 +4937,31 @@
           <a:ln/>
         </p:spPr>
         <p:txBody>
-          <a:bodyPr wrap="square" lIns="0" tIns="0" rIns="0" bIns="0" rtlCol="0" anchor="t"/>
-          <a:lstStyle/>
+          <a:bodyPr wrap="square" lIns="0" tIns="0" rIns="0" bIns="0" rtlCol="0" anchor="t">
+            <a:normAutofit/>
+          </a:bodyPr>
+          <a:lstStyle/>
+          <a:p>
+            <a:pPr marL="342900" indent="-342900">
+              <a:spcAft>
+                <a:spcPts val="600"/>
+              </a:spcAft>
+              <a:buSzPct val="100000"/>
+              <a:buChar char="•"/>
+            </a:pPr>
+            <a:r>
+              <a:rPr lang="en-US" sz="1400" dirty="0">
+                <a:solidFill>
+                  <a:srgbClr val="1F2937"/>
+                </a:solidFill>
+                <a:latin typeface="Calibri" pitchFamily="34" charset="0"/>
+                <a:ea typeface="Calibri" pitchFamily="34" charset="-122"/>
+                <a:cs typeface="Calibri" pitchFamily="34" charset="-120"/>
+              </a:rPr>
+              <a:t>Least-privilege token: contents: read, security-events: write — don't hand the pipeline more than it needs</a:t>
+            </a:r>
+            <a:endParaRPr lang="en-US" sz="1400" dirty="0"/>
+          </a:p>
           <a:p>
             <a:pPr marL="342900" indent="-342900">
               <a:spcAft>
@@ -5155,7 +5217,9 @@
           <a:ln/>
         </p:spPr>
         <p:txBody>
-          <a:bodyPr wrap="square" lIns="0" tIns="0" rIns="0" bIns="0" rtlCol="0" anchor="t"/>
+          <a:bodyPr wrap="square" lIns="0" tIns="0" rIns="0" bIns="0" rtlCol="0" anchor="t">
+            <a:normAutofit/>
+          </a:bodyPr>
           <a:lstStyle/>
           <a:p>
             <a:pPr marL="342900" indent="-342900">
@@ -5283,7 +5347,9 @@
           <a:ln/>
         </p:spPr>
         <p:txBody>
-          <a:bodyPr wrap="square" lIns="0" tIns="0" rIns="0" bIns="0" rtlCol="0" anchor="ctr"/>
+          <a:bodyPr wrap="square" lIns="0" tIns="0" rIns="0" bIns="0" rtlCol="0" anchor="ctr">
+            <a:normAutofit/>
+          </a:bodyPr>
           <a:lstStyle/>
           <a:p>
             <a:pPr indent="0" marL="0">
@@ -5498,11 +5564,11 @@
         <p:spPr>
           <a:xfrm>
             <a:off x="457200" y="1325880"/>
-            <a:ext cx="8229600" cy="1207008"/>
+            <a:ext cx="8229600" cy="1719072"/>
           </a:xfrm>
           <a:prstGeom prst="roundRect">
             <a:avLst>
-              <a:gd name="adj" fmla="val 6061"/>
+              <a:gd name="adj" fmla="val 4255"/>
             </a:avLst>
           </a:prstGeom>
           <a:solidFill>
@@ -5527,7 +5593,7 @@
         <p:spPr>
           <a:xfrm>
             <a:off x="731520" y="1435608"/>
-            <a:ext cx="7680960" cy="987552"/>
+            <a:ext cx="7680960" cy="1499616"/>
           </a:xfrm>
           <a:prstGeom prst="rect">
             <a:avLst/>
@@ -5536,7 +5602,9 @@
           <a:ln/>
         </p:spPr>
         <p:txBody>
-          <a:bodyPr wrap="square" lIns="0" tIns="0" rIns="0" bIns="0" rtlCol="0" anchor="t"/>
+          <a:bodyPr wrap="square" lIns="0" tIns="0" rIns="0" bIns="0" rtlCol="0" anchor="t">
+            <a:normAutofit/>
+          </a:bodyPr>
           <a:lstStyle/>
           <a:p>
             <a:pPr marL="342900" indent="-342900">
@@ -5577,6 +5645,27 @@
                 <a:cs typeface="Calibri" pitchFamily="34" charset="-120"/>
               </a:rPr>
               <a:t>Log security events (authn, authz failures, anomalies)</a:t>
+            </a:r>
+            <a:endParaRPr lang="en-US" sz="1400" dirty="0"/>
+          </a:p>
+          <a:p>
+            <a:pPr marL="342900" indent="-342900">
+              <a:spcAft>
+                <a:spcPts val="600"/>
+              </a:spcAft>
+              <a:buSzPct val="100000"/>
+              <a:buChar char="•"/>
+            </a:pPr>
+            <a:r>
+              <a:rPr lang="en-US" sz="1400" dirty="0">
+                <a:solidFill>
+                  <a:srgbClr val="1F2937"/>
+                </a:solidFill>
+                <a:latin typeface="Calibri" pitchFamily="34" charset="0"/>
+                <a:ea typeface="Calibri" pitchFamily="34" charset="-122"/>
+                <a:cs typeface="Calibri" pitchFamily="34" charset="-120"/>
+              </a:rPr>
+              <a:t>Never log the secret/token value itself (CWE-532) — log reason=bad_token, not the token</a:t>
             </a:r>
             <a:endParaRPr lang="en-US" sz="1400" dirty="0"/>
           </a:p>
@@ -5835,7 +5924,9 @@
           <a:ln/>
         </p:spPr>
         <p:txBody>
-          <a:bodyPr wrap="square" lIns="0" tIns="0" rIns="0" bIns="0" rtlCol="0" anchor="t"/>
+          <a:bodyPr wrap="square" lIns="0" tIns="0" rIns="0" bIns="0" rtlCol="0" anchor="t">
+            <a:normAutofit/>
+          </a:bodyPr>
           <a:lstStyle/>
           <a:p>
             <a:pPr marL="342900" indent="-342900">
@@ -6733,7 +6824,9 @@
           <a:ln/>
         </p:spPr>
         <p:txBody>
-          <a:bodyPr wrap="square" lIns="0" tIns="0" rIns="0" bIns="0" rtlCol="0" anchor="t"/>
+          <a:bodyPr wrap="square" lIns="0" tIns="0" rIns="0" bIns="0" rtlCol="0" anchor="t">
+            <a:normAutofit/>
+          </a:bodyPr>
           <a:lstStyle/>
           <a:p>
             <a:pPr marL="342900" indent="-342900">
@@ -6982,7 +7075,9 @@
           <a:ln/>
         </p:spPr>
         <p:txBody>
-          <a:bodyPr wrap="square" lIns="0" tIns="0" rIns="0" bIns="0" rtlCol="0" anchor="t"/>
+          <a:bodyPr wrap="square" lIns="0" tIns="0" rIns="0" bIns="0" rtlCol="0" anchor="t">
+            <a:normAutofit/>
+          </a:bodyPr>
           <a:lstStyle/>
           <a:p>
             <a:pPr indent="0" marL="0">
@@ -7050,7 +7145,9 @@
           <a:ln/>
         </p:spPr>
         <p:txBody>
-          <a:bodyPr wrap="square" lIns="0" tIns="0" rIns="0" bIns="0" rtlCol="0" anchor="t"/>
+          <a:bodyPr wrap="square" lIns="0" tIns="0" rIns="0" bIns="0" rtlCol="0" anchor="t">
+            <a:normAutofit/>
+          </a:bodyPr>
           <a:lstStyle/>
           <a:p>
             <a:pPr marL="342900" indent="-342900">

--- a/slides/pptx/week15.pptx
+++ b/slides/pptx/week15.pptx
@@ -20,9 +20,11 @@
     <p:sldId id="268" r:id="rId14"/>
     <p:sldId id="269" r:id="rId15"/>
     <p:sldId id="270" r:id="rId16"/>
+    <p:sldId id="271" r:id="rId17"/>
+    <p:sldId id="272" r:id="rId18"/>
   </p:sldIdLst>
   <p:notesMasterIdLst>
-    <p:notesMasterId r:id="rId17"/>
+    <p:notesMasterId r:id="rId19"/>
   </p:notesMasterIdLst>
   <p:sldSz cx="9144000" cy="5143500"/>
   <p:notesSz cx="5143500" cy="9144000"/>
@@ -604,7 +606,7 @@
           <a:p>
             <a:r>
               <a:rPr lang="en-US" dirty="0"/>
-              <a:t>A design principle that recurs: when something breaks, DENY (fail closed), don't accidentally grant access (fail open). Verbose errors leak schema/secrets (recall W4 error-based enumeration). ~3 min.</a:t>
+              <a:t>A taste of incident response / forensics. Order of volatility: capture RAM before you pull the plug — it's gone on shutdown. 4625 (failed) / 4624 (success) are the login events they'd grep in a real investigation. ~4 min.</a:t>
             </a:r>
             <a:endParaRPr lang="en-US" dirty="0"/>
           </a:p>
@@ -692,7 +694,7 @@
           <a:p>
             <a:r>
               <a:rPr lang="en-US" dirty="0"/>
-              <a:t>The professional/ethical close: finding a bug is step one; managing it to a fix (with SLAs) is the job. Coordinated disclosure + security.txt = how to receive reports responsibly. Connects to the course ethics theme. ~3 min.</a:t>
+              <a:t>A design principle that recurs: when something breaks, DENY (fail closed), don't accidentally grant access (fail open). Verbose errors leak schema/secrets (recall W4 error-based enumeration). ~3 min.</a:t>
             </a:r>
             <a:endParaRPr lang="en-US" dirty="0"/>
           </a:p>
@@ -780,7 +782,7 @@
           <a:p>
             <a:r>
               <a:rPr lang="en-US" dirty="0"/>
-              <a:t>The capstone game. Both roles teach: Blue learns to configure gates, Red learns where gates have blind spots — but Red's menu is fixed to 3 attacks that actually map to a gate, not open-ended. Run it as live PRs against the pipeline. Weekly quiz Q6 asks for one gate they added + what it blocks + their personal flag — don't drop the flag half, it's graded too. ~3 min.</a:t>
+              <a:t>The professional/ethical close: finding a bug is step one; managing it to a fix (with SLAs) is the job. Coordinated disclosure + security.txt = how to receive reports responsibly. Connects to the course ethics theme. ~3 min.</a:t>
             </a:r>
             <a:endParaRPr lang="en-US" dirty="0"/>
           </a:p>
@@ -868,7 +870,7 @@
           <a:p>
             <a:r>
               <a:rPr lang="en-US" dirty="0"/>
-              <a:t>Two separate targets this week, both graded: security-ci.yml is the CI gate; insecure_service.py/secure_service.py (compose, :8090/:8091) is where the personal flag lives. The "build failing" screenshots are the proof the gate actually blocks — a green pipeline that never fails is useless, and one category alone undersells the deliverable. AI-resilient tasks count. This is also the last weekly quiz.</a:t>
+              <a:t>The synthesis slide, and arguably the whole course's closing argument: "secure by default" means someone has to have DECIDED the default, twice here — once in YAML severity filters, once in an except block. An unexamined default is always permissive. Walk both panels, land on the bottom line before the game. ~5 min.</a:t>
             </a:r>
             <a:endParaRPr lang="en-US" dirty="0"/>
           </a:p>
@@ -956,7 +958,7 @@
           <a:p>
             <a:r>
               <a:rPr lang="en-US" dirty="0"/>
-              <a:t>Recap + course wrap of the technical units. Cold-call: "why must the gate FAIL the build, not just warn?" (warnings get ignored). ~2 min.</a:t>
+              <a:t>The capstone game. Both roles teach: Blue learns to configure gates, Red learns where gates have blind spots — but Red's menu is fixed to 3 attacks that actually map to a gate, not open-ended. Run it as live PRs against the pipeline. Weekly quiz Q6 asks for one gate they added + what it blocks + their personal flag — don't drop the flag half, it's graded too. ~3 min.</a:t>
             </a:r>
             <a:endParaRPr lang="en-US" dirty="0"/>
           </a:p>
@@ -1044,7 +1046,7 @@
           <a:p>
             <a:r>
               <a:rPr lang="en-US" dirty="0"/>
-              <a:t>Wrap: "Teaching is done — next is your capstone: ship something secure, then defend it in the final CTF. Bring your project to the studio."</a:t>
+              <a:t>Two separate targets this week, both graded: security-ci.yml is the CI gate; insecure_service.py/secure_service.py (compose, :8090/:8091) is where the personal flag lives. The "build failing" screenshots are the proof the gate actually blocks — a green pipeline that never fails is useless, and one category alone undersells the deliverable. AI-resilient tasks count. This is also the last weekly quiz.</a:t>
             </a:r>
             <a:endParaRPr lang="en-US" dirty="0"/>
           </a:p>
@@ -1068,6 +1070,182 @@
             <a:fld id="{F7021451-1387-4CA6-816F-3879F97B5CBC}" type="slidenum">
               <a:rPr lang="en-US"/>
               <a:t>15</a:t>
+            </a:fld>
+            <a:endParaRPr lang="en-US"/>
+          </a:p>
+        </p:txBody>
+      </p:sp>
+    </p:spTree>
+    <p:extLst>
+      <p:ext uri="{BB962C8B-B14F-4D97-AF65-F5344CB8AC3E}">
+        <p14:creationId xmlns:p14="http://schemas.microsoft.com/office/powerpoint/2010/main" val="1024086991"/>
+      </p:ext>
+    </p:extLst>
+  </p:cSld>
+  <p:clrMapOvr>
+    <a:masterClrMapping/>
+  </p:clrMapOvr>
+</p:notes>
+</file>
+
+<file path=ppt/notesSlides/notesSlide16.xml><?xml version="1.0" encoding="utf-8"?>
+<p:notes xmlns:a="http://schemas.openxmlformats.org/drawingml/2006/main" xmlns:r="http://schemas.openxmlformats.org/officeDocument/2006/relationships" xmlns:p="http://schemas.openxmlformats.org/presentationml/2006/main">
+  <p:cSld>
+    <p:spTree>
+      <p:nvGrpSpPr>
+        <p:cNvPr id="1" name=""/>
+        <p:cNvGrpSpPr/>
+        <p:nvPr/>
+      </p:nvGrpSpPr>
+      <p:grpSpPr>
+        <a:xfrm>
+          <a:off x="0" y="0"/>
+          <a:ext cx="0" cy="0"/>
+          <a:chOff x="0" y="0"/>
+          <a:chExt cx="0" cy="0"/>
+        </a:xfrm>
+      </p:grpSpPr>
+      <p:sp>
+        <p:nvSpPr>
+          <p:cNvPr id="2" name="Slide Image Placeholder 1"/>
+          <p:cNvSpPr>
+            <a:spLocks noGrp="1" noRot="1" noChangeAspect="1"/>
+          </p:cNvSpPr>
+          <p:nvPr>
+            <p:ph type="sldImg"/>
+          </p:nvPr>
+        </p:nvSpPr>
+        <p:spPr/>
+      </p:sp>
+      <p:sp>
+        <p:nvSpPr>
+          <p:cNvPr id="3" name="Notes Placeholder 2"/>
+          <p:cNvSpPr>
+            <a:spLocks noGrp="1"/>
+          </p:cNvSpPr>
+          <p:nvPr>
+            <p:ph type="body" idx="1"/>
+          </p:nvPr>
+        </p:nvSpPr>
+        <p:spPr/>
+        <p:txBody>
+          <a:bodyPr/>
+          <a:lstStyle/>
+          <a:p>
+            <a:r>
+              <a:rPr lang="en-US" dirty="0"/>
+              <a:t>Recap + course wrap of the technical units. Cold-call: "why must the gate FAIL the build, not just warn?" (warnings get ignored). ~2 min.</a:t>
+            </a:r>
+            <a:endParaRPr lang="en-US" dirty="0"/>
+          </a:p>
+        </p:txBody>
+      </p:sp>
+      <p:sp>
+        <p:nvSpPr>
+          <p:cNvPr id="4" name="Slide Number Placeholder 3"/>
+          <p:cNvSpPr>
+            <a:spLocks noGrp="1"/>
+          </p:cNvSpPr>
+          <p:nvPr>
+            <p:ph type="sldNum" sz="quarter" idx="10"/>
+          </p:nvPr>
+        </p:nvSpPr>
+        <p:spPr/>
+        <p:txBody>
+          <a:bodyPr/>
+          <a:lstStyle/>
+          <a:p>
+            <a:fld id="{F7021451-1387-4CA6-816F-3879F97B5CBC}" type="slidenum">
+              <a:rPr lang="en-US"/>
+              <a:t>16</a:t>
+            </a:fld>
+            <a:endParaRPr lang="en-US"/>
+          </a:p>
+        </p:txBody>
+      </p:sp>
+    </p:spTree>
+    <p:extLst>
+      <p:ext uri="{BB962C8B-B14F-4D97-AF65-F5344CB8AC3E}">
+        <p14:creationId xmlns:p14="http://schemas.microsoft.com/office/powerpoint/2010/main" val="1024086991"/>
+      </p:ext>
+    </p:extLst>
+  </p:cSld>
+  <p:clrMapOvr>
+    <a:masterClrMapping/>
+  </p:clrMapOvr>
+</p:notes>
+</file>
+
+<file path=ppt/notesSlides/notesSlide17.xml><?xml version="1.0" encoding="utf-8"?>
+<p:notes xmlns:a="http://schemas.openxmlformats.org/drawingml/2006/main" xmlns:r="http://schemas.openxmlformats.org/officeDocument/2006/relationships" xmlns:p="http://schemas.openxmlformats.org/presentationml/2006/main">
+  <p:cSld>
+    <p:spTree>
+      <p:nvGrpSpPr>
+        <p:cNvPr id="1" name=""/>
+        <p:cNvGrpSpPr/>
+        <p:nvPr/>
+      </p:nvGrpSpPr>
+      <p:grpSpPr>
+        <a:xfrm>
+          <a:off x="0" y="0"/>
+          <a:ext cx="0" cy="0"/>
+          <a:chOff x="0" y="0"/>
+          <a:chExt cx="0" cy="0"/>
+        </a:xfrm>
+      </p:grpSpPr>
+      <p:sp>
+        <p:nvSpPr>
+          <p:cNvPr id="2" name="Slide Image Placeholder 1"/>
+          <p:cNvSpPr>
+            <a:spLocks noGrp="1" noRot="1" noChangeAspect="1"/>
+          </p:cNvSpPr>
+          <p:nvPr>
+            <p:ph type="sldImg"/>
+          </p:nvPr>
+        </p:nvSpPr>
+        <p:spPr/>
+      </p:sp>
+      <p:sp>
+        <p:nvSpPr>
+          <p:cNvPr id="3" name="Notes Placeholder 2"/>
+          <p:cNvSpPr>
+            <a:spLocks noGrp="1"/>
+          </p:cNvSpPr>
+          <p:nvPr>
+            <p:ph type="body" idx="1"/>
+          </p:nvPr>
+        </p:nvSpPr>
+        <p:spPr/>
+        <p:txBody>
+          <a:bodyPr/>
+          <a:lstStyle/>
+          <a:p>
+            <a:r>
+              <a:rPr lang="en-US" dirty="0"/>
+              <a:t>Wrap: "Teaching is done — next is your capstone: ship something secure, then defend it in the final CTF. Bring your project to the studio."</a:t>
+            </a:r>
+            <a:endParaRPr lang="en-US" dirty="0"/>
+          </a:p>
+        </p:txBody>
+      </p:sp>
+      <p:sp>
+        <p:nvSpPr>
+          <p:cNvPr id="4" name="Slide Number Placeholder 3"/>
+          <p:cNvSpPr>
+            <a:spLocks noGrp="1"/>
+          </p:cNvSpPr>
+          <p:nvPr>
+            <p:ph type="sldNum" sz="quarter" idx="10"/>
+          </p:nvPr>
+        </p:nvSpPr>
+        <p:spPr/>
+        <p:txBody>
+          <a:bodyPr/>
+          <a:lstStyle/>
+          <a:p>
+            <a:fld id="{F7021451-1387-4CA6-816F-3879F97B5CBC}" type="slidenum">
+              <a:rPr lang="en-US"/>
+              <a:t>17</a:t>
             </a:fld>
             <a:endParaRPr lang="en-US"/>
           </a:p>
@@ -1308,7 +1486,7 @@
           <a:p>
             <a:r>
               <a:rPr lang="en-US" dirty="0"/>
-              <a:t>The worked example — this is the lab's actual pipeline. Be precise: Trivy's active jobs are fs (SCA) and config (IaC) — the image-scan step exists in the YAML but is commented out/optional, don't claim it's active. The "runs twice" pattern (report step + separate gate step) is what Part 2 Q1 is built around — say it explicitly. The KEY line is "fail build on HIGH/CRITICAL": a gate that only warns gets ignored. ~6 min.</a:t>
+              <a:t>The worked example — this is the lab's actual pipeline. Be precise: Trivy's active jobs are fs (SCA) and config (IaC) — the image-scan step exists in the YAML but is commented out/optional, don't claim it's active. The "runs twice" pattern (report step + separate gate step) is what Part 2 Q1 is built around — say it explicitly. The sim's 2 decoys are the actual worksheet nuance: chmod 777 has no Trivy rule at any severity, while FROM:latest IS detected (DS-0001) but rated MEDIUM and filtered by severity:HIGH,CRITICAL — same green build, different reason. The KEY line is "fail build on HIGH/CRITICAL": a gate that only warns gets ignored. ~6 min.</a:t>
             </a:r>
             <a:endParaRPr lang="en-US" dirty="0"/>
           </a:p>
@@ -1396,7 +1574,7 @@
           <a:p>
             <a:r>
               <a:rPr lang="en-US" dirty="0"/>
-              <a:t>The managed equivalent they'll meet in industry. Same concept, less YAML to maintain. Mention SonarQube as the common quality-gate they'll see in internships. ~3 min.</a:t>
+              <a:t>The worked example — this is the lab's actual pipeline. Be precise: Trivy's active jobs are fs (SCA) and config (IaC) — the image-scan step exists in the YAML but is commented out/optional, don't claim it's active. The "runs twice" pattern (report step + separate gate step) is what Part 2 Q1 is built around — say it explicitly. The sim's 2 decoys are the actual worksheet nuance: chmod 777 has no Trivy rule at any severity, while FROM:latest IS detected (DS-0001) but rated MEDIUM and filtered by severity:HIGH,CRITICAL — same green build, different reason. The KEY line is "fail build on HIGH/CRITICAL": a gate that only warns gets ignored. ~6 min.</a:t>
             </a:r>
             <a:endParaRPr lang="en-US" dirty="0"/>
           </a:p>
@@ -1484,7 +1662,7 @@
           <a:p>
             <a:r>
               <a:rPr lang="en-US" dirty="0"/>
-              <a:t>Shift from prevention to detection. A09 (logging/monitoring failures) is a Top 10 risk because you can't respond to what you can't see. The CWE-532 point is graded (Part 2 Q4) and easy to skip if you only say "log security events" — a log line that captures the bad token has just created a new secrets-in-logs problem. Recall W6: we read attacker actions FROM logs — but only if they were logged. ~4 min.</a:t>
+              <a:t>The managed equivalent they'll meet in industry. Same concept, less YAML to maintain. Mention SonarQube as the common quality-gate they'll see in internships. ~3 min.</a:t>
             </a:r>
             <a:endParaRPr lang="en-US" dirty="0"/>
           </a:p>
@@ -1572,7 +1750,7 @@
           <a:p>
             <a:r>
               <a:rPr lang="en-US" dirty="0"/>
-              <a:t>Awareness of the defender's toolkit. NIDS watches the wire, HIDS watches the host, SIEM correlates everything. TAP vs SPAN is a practical gotcha: SPAN ports drop packets under load — you miss attacks. Keep brisk. ~3 min.</a:t>
+              <a:t>Shift from prevention to detection. A09 (logging/monitoring failures) is a Top 10 risk because you can't respond to what you can't see. The CWE-532 point is graded (Part 2 Q4) and easy to skip if you only say "log security events" — a log line that captures the bad token has just created a new secrets-in-logs problem. Recall W6: we read attacker actions FROM logs — but only if they were logged. ~4 min.</a:t>
             </a:r>
             <a:endParaRPr lang="en-US" dirty="0"/>
           </a:p>
@@ -1660,7 +1838,7 @@
           <a:p>
             <a:r>
               <a:rPr lang="en-US" dirty="0"/>
-              <a:t>Ties back to W2 triage. The danger asymmetry: a false negative = an attack you never saw. But too many false positives → alert fatigue → analysts mute everything → effective false negatives. The skill is TUNING. ~4 min.</a:t>
+              <a:t>Awareness of the defender's toolkit. NIDS watches the wire, HIDS watches the host, SIEM correlates everything. TAP vs SPAN is a practical gotcha: SPAN ports drop packets under load — you miss attacks. Keep brisk. ~3 min.</a:t>
             </a:r>
             <a:endParaRPr lang="en-US" dirty="0"/>
           </a:p>
@@ -1748,7 +1926,7 @@
           <a:p>
             <a:r>
               <a:rPr lang="en-US" dirty="0"/>
-              <a:t>A taste of incident response / forensics. Order of volatility: capture RAM before you pull the plug — it's gone on shutdown. 4625 (failed) / 4624 (success) are the login events they'd grep in a real investigation. ~4 min.</a:t>
+              <a:t>Ties back to W2 triage. The danger asymmetry: a false negative = an attack you never saw. But too many false positives → alert fatigue → analysts mute everything → effective false negatives. The skill is TUNING. ~4 min.</a:t>
             </a:r>
             <a:endParaRPr lang="en-US" dirty="0"/>
           </a:p>
@@ -2381,7 +2559,7 @@
                 <a:ea typeface="Arial" pitchFamily="34" charset="-122"/>
                 <a:cs typeface="Arial" pitchFamily="34" charset="-120"/>
               </a:rPr>
-              <a:t>Fail safely</a:t>
+              <a:t>When something happens (NIST SP 800-86)</a:t>
             </a:r>
             <a:endParaRPr lang="en-US" sz="2600" dirty="0"/>
           </a:p>
@@ -2389,18 +2567,59 @@
       </p:sp>
       <p:sp>
         <p:nvSpPr>
-          <p:cNvPr id="5" name="Shape 2"/>
-          <p:cNvSpPr/>
-          <p:nvPr/>
-        </p:nvSpPr>
-        <p:spPr>
-          <a:xfrm>
-            <a:off x="457200" y="1325880"/>
-            <a:ext cx="8229600" cy="1207008"/>
+          <p:cNvPr id="5" name="Text 2"/>
+          <p:cNvSpPr/>
+          <p:nvPr/>
+        </p:nvSpPr>
+        <p:spPr>
+          <a:xfrm>
+            <a:off x="548640" y="1325880"/>
+            <a:ext cx="8046720" cy="548640"/>
+          </a:xfrm>
+          <a:prstGeom prst="rect">
+            <a:avLst/>
+          </a:prstGeom>
+          <a:noFill/>
+          <a:ln/>
+        </p:spPr>
+        <p:txBody>
+          <a:bodyPr wrap="square" lIns="0" tIns="0" rIns="0" bIns="0" rtlCol="0" anchor="t">
+            <a:normAutofit/>
+          </a:bodyPr>
+          <a:lstStyle/>
+          <a:p>
+            <a:pPr indent="0" marL="0">
+              <a:buNone/>
+            </a:pPr>
+            <a:r>
+              <a:rPr lang="en-US" sz="1400" dirty="0">
+                <a:solidFill>
+                  <a:srgbClr val="1F2937"/>
+                </a:solidFill>
+                <a:latin typeface="Calibri" pitchFamily="34" charset="0"/>
+                <a:ea typeface="Calibri" pitchFamily="34" charset="-122"/>
+                <a:cs typeface="Calibri" pitchFamily="34" charset="-120"/>
+              </a:rPr>
+              <a:t>Collection → Examination → Analysis → Reporting</a:t>
+            </a:r>
+            <a:endParaRPr lang="en-US" sz="1400" dirty="0"/>
+          </a:p>
+        </p:txBody>
+      </p:sp>
+      <p:sp>
+        <p:nvSpPr>
+          <p:cNvPr id="6" name="Shape 3"/>
+          <p:cNvSpPr/>
+          <p:nvPr/>
+        </p:nvSpPr>
+        <p:spPr>
+          <a:xfrm>
+            <a:off x="457200" y="1965960"/>
+            <a:ext cx="8229600" cy="896112"/>
           </a:xfrm>
           <a:prstGeom prst="roundRect">
             <a:avLst>
-              <a:gd name="adj" fmla="val 6061"/>
+              <a:gd name="adj" fmla="val 8163"/>
             </a:avLst>
           </a:prstGeom>
           <a:solidFill>
@@ -2418,14 +2637,14 @@
       </p:sp>
       <p:sp>
         <p:nvSpPr>
-          <p:cNvPr id="6" name="Text 3"/>
-          <p:cNvSpPr/>
-          <p:nvPr/>
-        </p:nvSpPr>
-        <p:spPr>
-          <a:xfrm>
-            <a:off x="731520" y="1435608"/>
-            <a:ext cx="7680960" cy="987552"/>
+          <p:cNvPr id="7" name="Text 4"/>
+          <p:cNvSpPr/>
+          <p:nvPr/>
+        </p:nvSpPr>
+        <p:spPr>
+          <a:xfrm>
+            <a:off x="731520" y="2075688"/>
+            <a:ext cx="7680960" cy="676656"/>
           </a:xfrm>
           <a:prstGeom prst="rect">
             <a:avLst/>
@@ -2455,7 +2674,7 @@
                 <a:ea typeface="Calibri" pitchFamily="34" charset="-122"/>
                 <a:cs typeface="Calibri" pitchFamily="34" charset="-120"/>
               </a:rPr>
-              <a:t>A10:2025 — mishandled errors leak info / fail open</a:t>
+              <a:t>Preserve order of volatility: memory → temp files → disk → logs</a:t>
             </a:r>
             <a:endParaRPr lang="en-US" sz="1400" dirty="0"/>
           </a:p>
@@ -2476,66 +2695,45 @@
                 <a:ea typeface="Calibri" pitchFamily="34" charset="-122"/>
                 <a:cs typeface="Calibri" pitchFamily="34" charset="-120"/>
               </a:rPr>
-              <a:t>Fail closed: deny on error, don't bypass checks</a:t>
+              <a:t>Failed/success logins: Windows Event 4625 / 4624</a:t>
             </a:r>
             <a:endParaRPr lang="en-US" sz="1400" dirty="0"/>
           </a:p>
-          <a:p>
-            <a:pPr marL="342900" indent="-342900">
-              <a:spcAft>
-                <a:spcPts val="600"/>
-              </a:spcAft>
-              <a:buSzPct val="100000"/>
-              <a:buChar char="•"/>
-            </a:pPr>
-            <a:r>
-              <a:rPr lang="en-US" sz="1400" dirty="0">
-                <a:solidFill>
-                  <a:srgbClr val="1F2937"/>
+        </p:txBody>
+      </p:sp>
+      <p:sp>
+        <p:nvSpPr>
+          <p:cNvPr id="8" name="Text 5"/>
+          <p:cNvSpPr/>
+          <p:nvPr/>
+        </p:nvSpPr>
+        <p:spPr>
+          <a:xfrm>
+            <a:off x="457200" y="4800600"/>
+            <a:ext cx="6949440" cy="274320"/>
+          </a:xfrm>
+          <a:prstGeom prst="rect">
+            <a:avLst/>
+          </a:prstGeom>
+          <a:noFill/>
+          <a:ln/>
+        </p:spPr>
+        <p:txBody>
+          <a:bodyPr wrap="square" lIns="0" tIns="0" rIns="0" bIns="0" rtlCol="0" anchor="ctr"/>
+          <a:lstStyle/>
+          <a:p>
+            <a:pPr indent="0" marL="0">
+              <a:buNone/>
+            </a:pPr>
+            <a:r>
+              <a:rPr lang="en-US" sz="900" dirty="0">
+                <a:solidFill>
+                  <a:srgbClr val="64748B"/>
                 </a:solidFill>
                 <a:latin typeface="Calibri" pitchFamily="34" charset="0"/>
                 <a:ea typeface="Calibri" pitchFamily="34" charset="-122"/>
                 <a:cs typeface="Calibri" pitchFamily="34" charset="-120"/>
               </a:rPr>
-              <a:t>Don't expose stack traces / secrets in errors</a:t>
-            </a:r>
-            <a:endParaRPr lang="en-US" sz="1400" dirty="0"/>
-          </a:p>
-        </p:txBody>
-      </p:sp>
-      <p:sp>
-        <p:nvSpPr>
-          <p:cNvPr id="7" name="Text 4"/>
-          <p:cNvSpPr/>
-          <p:nvPr/>
-        </p:nvSpPr>
-        <p:spPr>
-          <a:xfrm>
-            <a:off x="457200" y="4800600"/>
-            <a:ext cx="6949440" cy="274320"/>
-          </a:xfrm>
-          <a:prstGeom prst="rect">
-            <a:avLst/>
-          </a:prstGeom>
-          <a:noFill/>
-          <a:ln/>
-        </p:spPr>
-        <p:txBody>
-          <a:bodyPr wrap="square" lIns="0" tIns="0" rIns="0" bIns="0" rtlCol="0" anchor="ctr"/>
-          <a:lstStyle/>
-          <a:p>
-            <a:pPr indent="0" marL="0">
-              <a:buNone/>
-            </a:pPr>
-            <a:r>
-              <a:rPr lang="en-US" sz="900" dirty="0">
-                <a:solidFill>
-                  <a:srgbClr val="64748B"/>
-                </a:solidFill>
-                <a:latin typeface="Calibri" pitchFamily="34" charset="0"/>
-                <a:ea typeface="Calibri" pitchFamily="34" charset="-122"/>
-                <a:cs typeface="Calibri" pitchFamily="34" charset="-120"/>
-              </a:rPr>
               <a:t>Software Security · Week 15</a:t>
             </a:r>
             <a:endParaRPr lang="en-US" sz="900" dirty="0"/>
@@ -2544,7 +2742,7 @@
       </p:sp>
       <p:pic>
         <p:nvPicPr>
-          <p:cNvPr id="8" name="Image 1" descr="/Users/pop7/Library/CloudStorage/OneDrive-MonsterConnectCo.,Ltd/Lecture/KOSEN69 - software-security/slides/pptx/assets/logo-small.png">    </p:cNvPr>
+          <p:cNvPr id="9" name="Image 1" descr="/Users/pop7/Library/CloudStorage/OneDrive-MonsterConnectCo.,Ltd/Lecture/KOSEN69 - software-security/slides/pptx/assets/logo-small.png">    </p:cNvPr>
           <p:cNvPicPr>
             <a:picLocks noChangeAspect="1"/>
           </p:cNvPicPr>
@@ -2682,7 +2880,7 @@
                 <a:ea typeface="Arial" pitchFamily="34" charset="-122"/>
                 <a:cs typeface="Arial" pitchFamily="34" charset="-120"/>
               </a:rPr>
-              <a:t>Vulnerability management &amp; disclosure</a:t>
+              <a:t>Fail safely</a:t>
             </a:r>
             <a:endParaRPr lang="en-US" sz="2600" dirty="0"/>
           </a:p>
@@ -2756,7 +2954,7 @@
                 <a:ea typeface="Calibri" pitchFamily="34" charset="-122"/>
                 <a:cs typeface="Calibri" pitchFamily="34" charset="-120"/>
               </a:rPr>
-              <a:t>Triage by severity; track to remediation (SLAs)</a:t>
+              <a:t>A10:2025 — mishandled errors leak info / fail open</a:t>
             </a:r>
             <a:endParaRPr lang="en-US" sz="1400" dirty="0"/>
           </a:p>
@@ -2777,7 +2975,7 @@
                 <a:ea typeface="Calibri" pitchFamily="34" charset="-122"/>
                 <a:cs typeface="Calibri" pitchFamily="34" charset="-120"/>
               </a:rPr>
-              <a:t>Coordinated disclosure &amp; bug bounties</a:t>
+              <a:t>Fail closed: deny on error, don't bypass checks</a:t>
             </a:r>
             <a:endParaRPr lang="en-US" sz="1400" dirty="0"/>
           </a:p>
@@ -2798,7 +2996,7 @@
                 <a:ea typeface="Calibri" pitchFamily="34" charset="-122"/>
                 <a:cs typeface="Calibri" pitchFamily="34" charset="-120"/>
               </a:rPr>
-              <a:t>security.txt; a path for researchers to report</a:t>
+              <a:t>Don't expose stack traces / secrets in errors</a:t>
             </a:r>
             <a:endParaRPr lang="en-US" sz="1400" dirty="0"/>
           </a:p>
@@ -2983,7 +3181,7 @@
                 <a:ea typeface="Arial" pitchFamily="34" charset="-122"/>
                 <a:cs typeface="Arial" pitchFamily="34" charset="-120"/>
               </a:rPr>
-              <a:t>🔴🔵 Game — Break the Build</a:t>
+              <a:t>Vulnerability management &amp; disclosure</a:t>
             </a:r>
             <a:endParaRPr lang="en-US" sz="2600" dirty="0"/>
           </a:p>
@@ -2998,11 +3196,11 @@
         <p:spPr>
           <a:xfrm>
             <a:off x="457200" y="1325880"/>
-            <a:ext cx="8229600" cy="2011680"/>
+            <a:ext cx="8229600" cy="1207008"/>
           </a:xfrm>
           <a:prstGeom prst="roundRect">
             <a:avLst>
-              <a:gd name="adj" fmla="val 3636"/>
+              <a:gd name="adj" fmla="val 6061"/>
             </a:avLst>
           </a:prstGeom>
           <a:solidFill>
@@ -3027,7 +3225,7 @@
         <p:spPr>
           <a:xfrm>
             <a:off x="731520" y="1435608"/>
-            <a:ext cx="7680960" cy="1792224"/>
+            <a:ext cx="7680960" cy="987552"/>
           </a:xfrm>
           <a:prstGeom prst="rect">
             <a:avLst/>
@@ -3057,7 +3255,7 @@
                 <a:ea typeface="Calibri" pitchFamily="34" charset="-122"/>
                 <a:cs typeface="Calibri" pitchFamily="34" charset="-120"/>
               </a:rPr>
-              <a:t>Blue: build the gate (Semgrep + Trivy + Gitleaks), fail on HIGH/CRITICAL, add security logging that fails closed</a:t>
+              <a:t>Triage by severity; track to remediation (SLAs)</a:t>
             </a:r>
             <a:endParaRPr lang="en-US" sz="1400" dirty="0"/>
           </a:p>
@@ -3078,7 +3276,7 @@
                 <a:ea typeface="Calibri" pitchFamily="34" charset="-122"/>
                 <a:cs typeface="Calibri" pitchFamily="34" charset="-120"/>
               </a:rPr>
-              <a:t>Red: three gate-mapped attacks only — outdated dependency (Trivy SCA), a Dockerfile running as root (Trivy config), a hardcoded token (Gitleaks). chmod 777 and FROM:latest are decoys that stay green — not gate bypasses</a:t>
+              <a:t>Coordinated disclosure &amp; bug bounties</a:t>
             </a:r>
             <a:endParaRPr lang="en-US" sz="1400" dirty="0"/>
           </a:p>
@@ -3099,7 +3297,7 @@
                 <a:ea typeface="Calibri" pitchFamily="34" charset="-122"/>
                 <a:cs typeface="Calibri" pitchFamily="34" charset="-120"/>
               </a:rPr>
-              <a:t>Score: Blue per catch, Red per successful bypass; then capture your personal flag from the fail-open /admin bypass in insecure_service.py</a:t>
+              <a:t>security.txt; a path for researchers to report</a:t>
             </a:r>
             <a:endParaRPr lang="en-US" sz="1400" dirty="0"/>
           </a:p>
@@ -3284,7 +3482,7 @@
                 <a:ea typeface="Arial" pitchFamily="34" charset="-122"/>
                 <a:cs typeface="Arial" pitchFamily="34" charset="-120"/>
               </a:rPr>
-              <a:t>Deliverable</a:t>
+              <a:t>One decision, made twice</a:t>
             </a:r>
             <a:endParaRPr lang="en-US" sz="2600" dirty="0"/>
           </a:p>
@@ -3292,36 +3490,14 @@
       </p:sp>
       <p:sp>
         <p:nvSpPr>
-          <p:cNvPr id="5" name="Shape 2"/>
-          <p:cNvSpPr/>
-          <p:nvPr/>
-        </p:nvSpPr>
-        <p:spPr>
-          <a:xfrm>
-            <a:off x="457200" y="1325880"/>
-            <a:ext cx="8229600" cy="1097280"/>
-          </a:xfrm>
-          <a:prstGeom prst="roundRect">
-            <a:avLst>
-              <a:gd name="adj" fmla="val 6667"/>
-            </a:avLst>
-          </a:prstGeom>
-          <a:solidFill>
-            <a:srgbClr val="E8EDF3"/>
-          </a:solidFill>
-          <a:ln/>
-        </p:spPr>
-      </p:sp>
-      <p:sp>
-        <p:nvSpPr>
-          <p:cNvPr id="6" name="Text 3"/>
-          <p:cNvSpPr/>
-          <p:nvPr/>
-        </p:nvSpPr>
-        <p:spPr>
-          <a:xfrm>
-            <a:off x="731520" y="1325880"/>
-            <a:ext cx="7680960" cy="1097280"/>
+          <p:cNvPr id="5" name="Text 2"/>
+          <p:cNvSpPr/>
+          <p:nvPr/>
+        </p:nvSpPr>
+        <p:spPr>
+          <a:xfrm>
+            <a:off x="548640" y="1325880"/>
+            <a:ext cx="8046720" cy="2743200"/>
           </a:xfrm>
           <a:prstGeom prst="rect">
             <a:avLst/>
@@ -3330,7 +3506,7 @@
           <a:ln/>
         </p:spPr>
         <p:txBody>
-          <a:bodyPr wrap="square" lIns="0" tIns="0" rIns="0" bIns="0" rtlCol="0" anchor="ctr">
+          <a:bodyPr wrap="square" lIns="0" tIns="0" rIns="0" bIns="0" rtlCol="0" anchor="t">
             <a:normAutofit/>
           </a:bodyPr>
           <a:lstStyle/>
@@ -3339,15 +3515,15 @@
               <a:buNone/>
             </a:pPr>
             <a:r>
-              <a:rPr lang="en-US" sz="1400" i="1" dirty="0">
-                <a:solidFill>
-                  <a:srgbClr val="E35205"/>
+              <a:rPr lang="en-US" sz="1400" dirty="0">
+                <a:solidFill>
+                  <a:srgbClr val="1F2937"/>
                 </a:solidFill>
                 <a:latin typeface="Calibri" pitchFamily="34" charset="0"/>
                 <a:ea typeface="Calibri" pitchFamily="34" charset="-122"/>
                 <a:cs typeface="Calibri" pitchFamily="34" charset="-120"/>
               </a:rPr>
-              <a:t>📋 Worksheet 15 — labs/week15-devsecops-pipeline/worksheet.md (Part 3) · kickoff: push security-ci.yml → GitHub Actions; separately, docker compose up → :8090 (insecure) / :8091 (secure) for the flag task</a:t>
+              <a:t>See diagram: Two panels showing the same yes-or-no decision at two different times. Build time: the CI gate's HIGH/CRITICAL severity filter, not the scanner itself, decides what a build refuses — root user (DS-0002, HIGH) is caught, :latest (DS-0001, MEDIUM) slips past the filter. Run time: the /admin handler makes the identical decision on an exception — fail-open returns 200 and logs nothing (silent bypass, A09); fail-closed returns 403 and logs event=authz_failure without ever logging the token itself (CWE-532). Both defaults, unexamined, are yes: the gate exits 0 on anything it wasn't told to fail on, the handler returns 200 on anything that threw. Nobody chose — that silence is A10, CWE-636. (web only)</a:t>
             </a:r>
             <a:endParaRPr lang="en-US" sz="1400" dirty="0"/>
           </a:p>
@@ -3355,43 +3531,14 @@
       </p:sp>
       <p:sp>
         <p:nvSpPr>
-          <p:cNvPr id="7" name="Shape 4"/>
-          <p:cNvSpPr/>
-          <p:nvPr/>
-        </p:nvSpPr>
-        <p:spPr>
-          <a:xfrm>
-            <a:off x="457200" y="2587752"/>
-            <a:ext cx="8229600" cy="1920240"/>
-          </a:xfrm>
-          <a:prstGeom prst="roundRect">
-            <a:avLst>
-              <a:gd name="adj" fmla="val 3810"/>
-            </a:avLst>
-          </a:prstGeom>
-          <a:solidFill>
-            <a:srgbClr val="F1F5F9"/>
-          </a:solidFill>
-          <a:ln/>
-          <a:effectLst>
-            <a:outerShdw sx="100000" sy="100000" kx="0" ky="0" algn="bl" rotWithShape="0" blurRad="76200" dist="25400" dir="5400000">
-              <a:srgbClr val="000000">
-                <a:alpha val="12000"/>
-              </a:srgbClr>
-            </a:outerShdw>
-          </a:effectLst>
-        </p:spPr>
-      </p:sp>
-      <p:sp>
-        <p:nvSpPr>
-          <p:cNvPr id="8" name="Text 5"/>
-          <p:cNvSpPr/>
-          <p:nvPr/>
-        </p:nvSpPr>
-        <p:spPr>
-          <a:xfrm>
-            <a:off x="731520" y="2697480"/>
-            <a:ext cx="7680960" cy="1700784"/>
+          <p:cNvPr id="6" name="Text 3"/>
+          <p:cNvSpPr/>
+          <p:nvPr/>
+        </p:nvSpPr>
+        <p:spPr>
+          <a:xfrm>
+            <a:off x="457200" y="4800600"/>
+            <a:ext cx="6949440" cy="274320"/>
           </a:xfrm>
           <a:prstGeom prst="rect">
             <a:avLst/>
@@ -3400,129 +3547,21 @@
           <a:ln/>
         </p:spPr>
         <p:txBody>
-          <a:bodyPr wrap="square" lIns="0" tIns="0" rIns="0" bIns="0" rtlCol="0" anchor="t">
-            <a:normAutofit/>
-          </a:bodyPr>
-          <a:lstStyle/>
-          <a:p>
-            <a:pPr marL="342900" indent="-342900">
-              <a:spcAft>
-                <a:spcPts val="600"/>
-              </a:spcAft>
-              <a:buSzPct val="100000"/>
-              <a:buChar char="•"/>
-            </a:pPr>
-            <a:r>
-              <a:rPr lang="en-US" sz="1400" dirty="0">
-                <a:solidFill>
-                  <a:srgbClr val="1F2937"/>
+          <a:bodyPr wrap="square" lIns="0" tIns="0" rIns="0" bIns="0" rtlCol="0" anchor="ctr"/>
+          <a:lstStyle/>
+          <a:p>
+            <a:pPr indent="0" marL="0">
+              <a:buNone/>
+            </a:pPr>
+            <a:r>
+              <a:rPr lang="en-US" sz="900" dirty="0">
+                <a:solidFill>
+                  <a:srgbClr val="64748B"/>
                 </a:solidFill>
                 <a:latin typeface="Calibri" pitchFamily="34" charset="0"/>
                 <a:ea typeface="Calibri" pitchFamily="34" charset="-122"/>
                 <a:cs typeface="Calibri" pitchFamily="34" charset="-120"/>
               </a:rPr>
-              <a:t>A passing PR that adds the pipeline</a:t>
-            </a:r>
-            <a:endParaRPr lang="en-US" sz="1400" dirty="0"/>
-          </a:p>
-          <a:p>
-            <a:pPr marL="342900" indent="-342900">
-              <a:spcAft>
-                <a:spcPts val="600"/>
-              </a:spcAft>
-              <a:buSzPct val="100000"/>
-              <a:buChar char="•"/>
-            </a:pPr>
-            <a:r>
-              <a:rPr lang="en-US" sz="1400" dirty="0">
-                <a:solidFill>
-                  <a:srgbClr val="1F2937"/>
-                </a:solidFill>
-                <a:latin typeface="Calibri" pitchFamily="34" charset="0"/>
-                <a:ea typeface="Calibri" pitchFamily="34" charset="-122"/>
-                <a:cs typeface="Calibri" pitchFamily="34" charset="-120"/>
-              </a:rPr>
-              <a:t>Screenshot: build failing on each of the 3 Red-team categories (dependency, root Dockerfile, hardcoded token) — not just one</a:t>
-            </a:r>
-            <a:endParaRPr lang="en-US" sz="1400" dirty="0"/>
-          </a:p>
-          <a:p>
-            <a:pPr marL="342900" indent="-342900">
-              <a:spcAft>
-                <a:spcPts val="600"/>
-              </a:spcAft>
-              <a:buSzPct val="100000"/>
-              <a:buChar char="•"/>
-            </a:pPr>
-            <a:r>
-              <a:rPr lang="en-US" sz="1400" dirty="0">
-                <a:solidFill>
-                  <a:srgbClr val="1F2937"/>
-                </a:solidFill>
-                <a:latin typeface="Calibri" pitchFamily="34" charset="0"/>
-                <a:ea typeface="Calibri" pitchFamily="34" charset="-122"/>
-                <a:cs typeface="Calibri" pitchFamily="34" charset="-120"/>
-              </a:rPr>
-              <a:t>Your personal FLAG{...} from the fail-open /admin bypass, submitted with this week's quiz Q6</a:t>
-            </a:r>
-            <a:endParaRPr lang="en-US" sz="1400" dirty="0"/>
-          </a:p>
-          <a:p>
-            <a:pPr marL="342900" indent="-342900">
-              <a:spcAft>
-                <a:spcPts val="600"/>
-              </a:spcAft>
-              <a:buSzPct val="100000"/>
-              <a:buChar char="•"/>
-            </a:pPr>
-            <a:r>
-              <a:rPr lang="en-US" sz="1400" dirty="0">
-                <a:solidFill>
-                  <a:srgbClr val="1F2937"/>
-                </a:solidFill>
-                <a:latin typeface="Calibri" pitchFamily="34" charset="0"/>
-                <a:ea typeface="Calibri" pitchFamily="34" charset="-122"/>
-                <a:cs typeface="Calibri" pitchFamily="34" charset="-120"/>
-              </a:rPr>
-              <a:t>+ Audit the AI / EiPE / Prompt Problem (see worksheet)</a:t>
-            </a:r>
-            <a:endParaRPr lang="en-US" sz="1400" dirty="0"/>
-          </a:p>
-        </p:txBody>
-      </p:sp>
-      <p:sp>
-        <p:nvSpPr>
-          <p:cNvPr id="9" name="Text 6"/>
-          <p:cNvSpPr/>
-          <p:nvPr/>
-        </p:nvSpPr>
-        <p:spPr>
-          <a:xfrm>
-            <a:off x="457200" y="4800600"/>
-            <a:ext cx="6949440" cy="274320"/>
-          </a:xfrm>
-          <a:prstGeom prst="rect">
-            <a:avLst/>
-          </a:prstGeom>
-          <a:noFill/>
-          <a:ln/>
-        </p:spPr>
-        <p:txBody>
-          <a:bodyPr wrap="square" lIns="0" tIns="0" rIns="0" bIns="0" rtlCol="0" anchor="ctr"/>
-          <a:lstStyle/>
-          <a:p>
-            <a:pPr indent="0" marL="0">
-              <a:buNone/>
-            </a:pPr>
-            <a:r>
-              <a:rPr lang="en-US" sz="900" dirty="0">
-                <a:solidFill>
-                  <a:srgbClr val="64748B"/>
-                </a:solidFill>
-                <a:latin typeface="Calibri" pitchFamily="34" charset="0"/>
-                <a:ea typeface="Calibri" pitchFamily="34" charset="-122"/>
-                <a:cs typeface="Calibri" pitchFamily="34" charset="-120"/>
-              </a:rPr>
               <a:t>Software Security · Week 15</a:t>
             </a:r>
             <a:endParaRPr lang="en-US" sz="900" dirty="0"/>
@@ -3531,7 +3570,7 @@
       </p:sp>
       <p:pic>
         <p:nvPicPr>
-          <p:cNvPr id="10" name="Image 1" descr="/Users/pop7/Library/CloudStorage/OneDrive-MonsterConnectCo.,Ltd/Lecture/KOSEN69 - software-security/slides/pptx/assets/logo-small.png">    </p:cNvPr>
+          <p:cNvPr id="7" name="Image 1" descr="/Users/pop7/Library/CloudStorage/OneDrive-MonsterConnectCo.,Ltd/Lecture/KOSEN69 - software-security/slides/pptx/assets/logo-small.png">    </p:cNvPr>
           <p:cNvPicPr>
             <a:picLocks noChangeAspect="1"/>
           </p:cNvPicPr>
@@ -3669,7 +3708,7 @@
                 <a:ea typeface="Arial" pitchFamily="34" charset="-122"/>
                 <a:cs typeface="Arial" pitchFamily="34" charset="-120"/>
               </a:rPr>
-              <a:t>Key takeaways</a:t>
+              <a:t>🔴🔵 Game — Break the Build</a:t>
             </a:r>
             <a:endParaRPr lang="en-US" sz="2600" dirty="0"/>
           </a:p>
@@ -3684,11 +3723,11 @@
         <p:spPr>
           <a:xfrm>
             <a:off x="457200" y="1325880"/>
-            <a:ext cx="8229600" cy="1207008"/>
+            <a:ext cx="8229600" cy="2011680"/>
           </a:xfrm>
           <a:prstGeom prst="roundRect">
             <a:avLst>
-              <a:gd name="adj" fmla="val 6061"/>
+              <a:gd name="adj" fmla="val 3636"/>
             </a:avLst>
           </a:prstGeom>
           <a:solidFill>
@@ -3713,7 +3752,7 @@
         <p:spPr>
           <a:xfrm>
             <a:off x="731520" y="1435608"/>
-            <a:ext cx="7680960" cy="987552"/>
+            <a:ext cx="7680960" cy="1792224"/>
           </a:xfrm>
           <a:prstGeom prst="rect">
             <a:avLst/>
@@ -3743,7 +3782,7 @@
                 <a:ea typeface="Calibri" pitchFamily="34" charset="-122"/>
                 <a:cs typeface="Calibri" pitchFamily="34" charset="-120"/>
               </a:rPr>
-              <a:t>Automate security gates — humans forget, pipelines don't</a:t>
+              <a:t>Blue: build the gate (Semgrep + Trivy + Gitleaks), fail on HIGH/CRITICAL, add security logging that fails closed</a:t>
             </a:r>
             <a:endParaRPr lang="en-US" sz="1400" dirty="0"/>
           </a:p>
@@ -3764,7 +3803,7 @@
                 <a:ea typeface="Calibri" pitchFamily="34" charset="-122"/>
                 <a:cs typeface="Calibri" pitchFamily="34" charset="-120"/>
               </a:rPr>
-              <a:t>You can't defend what you don't log</a:t>
+              <a:t>Red: three gate-mapped attacks only — outdated dependency (Trivy SCA), a Dockerfile running as root (Trivy config), a hardcoded token (Gitleaks). chmod 777 and FROM:latest are decoys that stay green — not gate bypasses</a:t>
             </a:r>
             <a:endParaRPr lang="en-US" sz="1400" dirty="0"/>
           </a:p>
@@ -3785,7 +3824,7 @@
                 <a:ea typeface="Calibri" pitchFamily="34" charset="-122"/>
                 <a:cs typeface="Calibri" pitchFamily="34" charset="-120"/>
               </a:rPr>
-              <a:t>Fail closed; disclose responsibly</a:t>
+              <a:t>Score: Blue per catch, Red per successful bypass; then capture your personal flag from the fail-open /admin bypass in insecure_service.py</a:t>
             </a:r>
             <a:endParaRPr lang="en-US" sz="1400" dirty="0"/>
           </a:p>
@@ -3888,6 +3927,692 @@
       </p:grpSpPr>
       <p:sp>
         <p:nvSpPr>
+          <p:cNvPr id="2" name="Shape 0"/>
+          <p:cNvSpPr/>
+          <p:nvPr/>
+        </p:nvSpPr>
+        <p:spPr>
+          <a:xfrm>
+            <a:off x="457200" y="384048"/>
+            <a:ext cx="530352" cy="530352"/>
+          </a:xfrm>
+          <a:prstGeom prst="ellipse">
+            <a:avLst/>
+          </a:prstGeom>
+          <a:solidFill>
+            <a:srgbClr val="E35205"/>
+          </a:solidFill>
+          <a:ln/>
+          <a:effectLst>
+            <a:outerShdw sx="100000" sy="100000" kx="0" ky="0" algn="bl" rotWithShape="0" blurRad="76200" dist="25400" dir="5400000">
+              <a:srgbClr val="000000">
+                <a:alpha val="12000"/>
+              </a:srgbClr>
+            </a:outerShdw>
+          </a:effectLst>
+        </p:spPr>
+      </p:sp>
+      <p:pic>
+        <p:nvPicPr>
+          <p:cNvPr id="3" name="Image 0" descr="preencoded.png">    </p:cNvPr>
+          <p:cNvPicPr>
+            <a:picLocks noChangeAspect="1"/>
+          </p:cNvPicPr>
+          <p:nvPr/>
+        </p:nvPicPr>
+        <p:blipFill>
+          <a:blip r:embed="rId1"/>
+          <a:stretch>
+            <a:fillRect/>
+          </a:stretch>
+        </p:blipFill>
+        <p:spPr>
+          <a:xfrm>
+            <a:off x="594360" y="521208"/>
+            <a:ext cx="256032" cy="256032"/>
+          </a:xfrm>
+          <a:prstGeom prst="rect">
+            <a:avLst/>
+          </a:prstGeom>
+        </p:spPr>
+      </p:pic>
+      <p:sp>
+        <p:nvSpPr>
+          <p:cNvPr id="4" name="Text 1"/>
+          <p:cNvSpPr/>
+          <p:nvPr/>
+        </p:nvSpPr>
+        <p:spPr>
+          <a:xfrm>
+            <a:off x="1143000" y="329184"/>
+            <a:ext cx="7498080" cy="603504"/>
+          </a:xfrm>
+          <a:prstGeom prst="rect">
+            <a:avLst/>
+          </a:prstGeom>
+          <a:noFill/>
+          <a:ln/>
+        </p:spPr>
+        <p:txBody>
+          <a:bodyPr wrap="square" lIns="0" tIns="0" rIns="0" bIns="0" rtlCol="0" anchor="ctr"/>
+          <a:lstStyle/>
+          <a:p>
+            <a:pPr indent="0" marL="0">
+              <a:buNone/>
+            </a:pPr>
+            <a:r>
+              <a:rPr lang="en-US" sz="2600" b="1" dirty="0">
+                <a:solidFill>
+                  <a:srgbClr val="1F2937"/>
+                </a:solidFill>
+                <a:latin typeface="Arial" pitchFamily="34" charset="0"/>
+                <a:ea typeface="Arial" pitchFamily="34" charset="-122"/>
+                <a:cs typeface="Arial" pitchFamily="34" charset="-120"/>
+              </a:rPr>
+              <a:t>Deliverable</a:t>
+            </a:r>
+            <a:endParaRPr lang="en-US" sz="2600" dirty="0"/>
+          </a:p>
+        </p:txBody>
+      </p:sp>
+      <p:sp>
+        <p:nvSpPr>
+          <p:cNvPr id="5" name="Shape 2"/>
+          <p:cNvSpPr/>
+          <p:nvPr/>
+        </p:nvSpPr>
+        <p:spPr>
+          <a:xfrm>
+            <a:off x="457200" y="1325880"/>
+            <a:ext cx="8229600" cy="1097280"/>
+          </a:xfrm>
+          <a:prstGeom prst="roundRect">
+            <a:avLst>
+              <a:gd name="adj" fmla="val 6667"/>
+            </a:avLst>
+          </a:prstGeom>
+          <a:solidFill>
+            <a:srgbClr val="E8EDF3"/>
+          </a:solidFill>
+          <a:ln/>
+        </p:spPr>
+      </p:sp>
+      <p:sp>
+        <p:nvSpPr>
+          <p:cNvPr id="6" name="Text 3"/>
+          <p:cNvSpPr/>
+          <p:nvPr/>
+        </p:nvSpPr>
+        <p:spPr>
+          <a:xfrm>
+            <a:off x="731520" y="1325880"/>
+            <a:ext cx="7680960" cy="1097280"/>
+          </a:xfrm>
+          <a:prstGeom prst="rect">
+            <a:avLst/>
+          </a:prstGeom>
+          <a:noFill/>
+          <a:ln/>
+        </p:spPr>
+        <p:txBody>
+          <a:bodyPr wrap="square" lIns="0" tIns="0" rIns="0" bIns="0" rtlCol="0" anchor="ctr">
+            <a:normAutofit/>
+          </a:bodyPr>
+          <a:lstStyle/>
+          <a:p>
+            <a:pPr indent="0" marL="0">
+              <a:buNone/>
+            </a:pPr>
+            <a:r>
+              <a:rPr lang="en-US" sz="1400" i="1" dirty="0">
+                <a:solidFill>
+                  <a:srgbClr val="E35205"/>
+                </a:solidFill>
+                <a:latin typeface="Calibri" pitchFamily="34" charset="0"/>
+                <a:ea typeface="Calibri" pitchFamily="34" charset="-122"/>
+                <a:cs typeface="Calibri" pitchFamily="34" charset="-120"/>
+              </a:rPr>
+              <a:t>📋 Worksheet 15 — labs/week15-devsecops-pipeline/worksheet.md (Part 3) · kickoff: push security-ci.yml → GitHub Actions; separately, docker compose up → :8090 (insecure) / :8091 (secure) for the flag task</a:t>
+            </a:r>
+            <a:endParaRPr lang="en-US" sz="1400" dirty="0"/>
+          </a:p>
+        </p:txBody>
+      </p:sp>
+      <p:sp>
+        <p:nvSpPr>
+          <p:cNvPr id="7" name="Shape 4"/>
+          <p:cNvSpPr/>
+          <p:nvPr/>
+        </p:nvSpPr>
+        <p:spPr>
+          <a:xfrm>
+            <a:off x="457200" y="2587752"/>
+            <a:ext cx="8229600" cy="1920240"/>
+          </a:xfrm>
+          <a:prstGeom prst="roundRect">
+            <a:avLst>
+              <a:gd name="adj" fmla="val 3810"/>
+            </a:avLst>
+          </a:prstGeom>
+          <a:solidFill>
+            <a:srgbClr val="F1F5F9"/>
+          </a:solidFill>
+          <a:ln/>
+          <a:effectLst>
+            <a:outerShdw sx="100000" sy="100000" kx="0" ky="0" algn="bl" rotWithShape="0" blurRad="76200" dist="25400" dir="5400000">
+              <a:srgbClr val="000000">
+                <a:alpha val="12000"/>
+              </a:srgbClr>
+            </a:outerShdw>
+          </a:effectLst>
+        </p:spPr>
+      </p:sp>
+      <p:sp>
+        <p:nvSpPr>
+          <p:cNvPr id="8" name="Text 5"/>
+          <p:cNvSpPr/>
+          <p:nvPr/>
+        </p:nvSpPr>
+        <p:spPr>
+          <a:xfrm>
+            <a:off x="731520" y="2697480"/>
+            <a:ext cx="7680960" cy="1700784"/>
+          </a:xfrm>
+          <a:prstGeom prst="rect">
+            <a:avLst/>
+          </a:prstGeom>
+          <a:noFill/>
+          <a:ln/>
+        </p:spPr>
+        <p:txBody>
+          <a:bodyPr wrap="square" lIns="0" tIns="0" rIns="0" bIns="0" rtlCol="0" anchor="t">
+            <a:normAutofit/>
+          </a:bodyPr>
+          <a:lstStyle/>
+          <a:p>
+            <a:pPr marL="342900" indent="-342900">
+              <a:spcAft>
+                <a:spcPts val="600"/>
+              </a:spcAft>
+              <a:buSzPct val="100000"/>
+              <a:buChar char="•"/>
+            </a:pPr>
+            <a:r>
+              <a:rPr lang="en-US" sz="1400" dirty="0">
+                <a:solidFill>
+                  <a:srgbClr val="1F2937"/>
+                </a:solidFill>
+                <a:latin typeface="Calibri" pitchFamily="34" charset="0"/>
+                <a:ea typeface="Calibri" pitchFamily="34" charset="-122"/>
+                <a:cs typeface="Calibri" pitchFamily="34" charset="-120"/>
+              </a:rPr>
+              <a:t>A passing PR that adds the pipeline</a:t>
+            </a:r>
+            <a:endParaRPr lang="en-US" sz="1400" dirty="0"/>
+          </a:p>
+          <a:p>
+            <a:pPr marL="342900" indent="-342900">
+              <a:spcAft>
+                <a:spcPts val="600"/>
+              </a:spcAft>
+              <a:buSzPct val="100000"/>
+              <a:buChar char="•"/>
+            </a:pPr>
+            <a:r>
+              <a:rPr lang="en-US" sz="1400" dirty="0">
+                <a:solidFill>
+                  <a:srgbClr val="1F2937"/>
+                </a:solidFill>
+                <a:latin typeface="Calibri" pitchFamily="34" charset="0"/>
+                <a:ea typeface="Calibri" pitchFamily="34" charset="-122"/>
+                <a:cs typeface="Calibri" pitchFamily="34" charset="-120"/>
+              </a:rPr>
+              <a:t>Screenshot: build failing on each of the 3 Red-team categories (dependency, root Dockerfile, hardcoded token) — not just one</a:t>
+            </a:r>
+            <a:endParaRPr lang="en-US" sz="1400" dirty="0"/>
+          </a:p>
+          <a:p>
+            <a:pPr marL="342900" indent="-342900">
+              <a:spcAft>
+                <a:spcPts val="600"/>
+              </a:spcAft>
+              <a:buSzPct val="100000"/>
+              <a:buChar char="•"/>
+            </a:pPr>
+            <a:r>
+              <a:rPr lang="en-US" sz="1400" dirty="0">
+                <a:solidFill>
+                  <a:srgbClr val="1F2937"/>
+                </a:solidFill>
+                <a:latin typeface="Calibri" pitchFamily="34" charset="0"/>
+                <a:ea typeface="Calibri" pitchFamily="34" charset="-122"/>
+                <a:cs typeface="Calibri" pitchFamily="34" charset="-120"/>
+              </a:rPr>
+              <a:t>Your personal FLAG{...} from the fail-open /admin bypass, submitted with this week's quiz Q6</a:t>
+            </a:r>
+            <a:endParaRPr lang="en-US" sz="1400" dirty="0"/>
+          </a:p>
+          <a:p>
+            <a:pPr marL="342900" indent="-342900">
+              <a:spcAft>
+                <a:spcPts val="600"/>
+              </a:spcAft>
+              <a:buSzPct val="100000"/>
+              <a:buChar char="•"/>
+            </a:pPr>
+            <a:r>
+              <a:rPr lang="en-US" sz="1400" dirty="0">
+                <a:solidFill>
+                  <a:srgbClr val="1F2937"/>
+                </a:solidFill>
+                <a:latin typeface="Calibri" pitchFamily="34" charset="0"/>
+                <a:ea typeface="Calibri" pitchFamily="34" charset="-122"/>
+                <a:cs typeface="Calibri" pitchFamily="34" charset="-120"/>
+              </a:rPr>
+              <a:t>+ Audit the AI / EiPE / Prompt Problem (see worksheet)</a:t>
+            </a:r>
+            <a:endParaRPr lang="en-US" sz="1400" dirty="0"/>
+          </a:p>
+        </p:txBody>
+      </p:sp>
+      <p:sp>
+        <p:nvSpPr>
+          <p:cNvPr id="9" name="Text 6"/>
+          <p:cNvSpPr/>
+          <p:nvPr/>
+        </p:nvSpPr>
+        <p:spPr>
+          <a:xfrm>
+            <a:off x="457200" y="4800600"/>
+            <a:ext cx="6949440" cy="274320"/>
+          </a:xfrm>
+          <a:prstGeom prst="rect">
+            <a:avLst/>
+          </a:prstGeom>
+          <a:noFill/>
+          <a:ln/>
+        </p:spPr>
+        <p:txBody>
+          <a:bodyPr wrap="square" lIns="0" tIns="0" rIns="0" bIns="0" rtlCol="0" anchor="ctr"/>
+          <a:lstStyle/>
+          <a:p>
+            <a:pPr indent="0" marL="0">
+              <a:buNone/>
+            </a:pPr>
+            <a:r>
+              <a:rPr lang="en-US" sz="900" dirty="0">
+                <a:solidFill>
+                  <a:srgbClr val="64748B"/>
+                </a:solidFill>
+                <a:latin typeface="Calibri" pitchFamily="34" charset="0"/>
+                <a:ea typeface="Calibri" pitchFamily="34" charset="-122"/>
+                <a:cs typeface="Calibri" pitchFamily="34" charset="-120"/>
+              </a:rPr>
+              <a:t>Software Security · Week 15</a:t>
+            </a:r>
+            <a:endParaRPr lang="en-US" sz="900" dirty="0"/>
+          </a:p>
+        </p:txBody>
+      </p:sp>
+      <p:pic>
+        <p:nvPicPr>
+          <p:cNvPr id="10" name="Image 1" descr="/Users/pop7/Library/CloudStorage/OneDrive-MonsterConnectCo.,Ltd/Lecture/KOSEN69 - software-security/slides/pptx/assets/logo-small.png">    </p:cNvPr>
+          <p:cNvPicPr>
+            <a:picLocks noChangeAspect="1"/>
+          </p:cNvPicPr>
+          <p:nvPr/>
+        </p:nvPicPr>
+        <p:blipFill>
+          <a:blip r:embed="rId2"/>
+          <a:stretch>
+            <a:fillRect/>
+          </a:stretch>
+        </p:blipFill>
+        <p:spPr>
+          <a:xfrm>
+            <a:off x="7882128" y="4700016"/>
+            <a:ext cx="768096" cy="356616"/>
+          </a:xfrm>
+          <a:prstGeom prst="rect">
+            <a:avLst/>
+          </a:prstGeom>
+        </p:spPr>
+      </p:pic>
+    </p:spTree>
+  </p:cSld>
+  <p:clrMapOvr>
+    <a:masterClrMapping/>
+  </p:clrMapOvr>
+</p:sld>
+</file>
+
+<file path=ppt/slides/slide16.xml><?xml version="1.0" encoding="utf-8"?>
+<p:sld xmlns:a="http://schemas.openxmlformats.org/drawingml/2006/main" xmlns:r="http://schemas.openxmlformats.org/officeDocument/2006/relationships" xmlns:p="http://schemas.openxmlformats.org/presentationml/2006/main">
+  <p:cSld name="Slide 16">
+    <p:bg>
+      <p:bgPr>
+        <a:solidFill>
+          <a:srgbClr val="FFFFFF"/>
+        </a:solidFill>
+      </p:bgPr>
+    </p:bg>
+    <p:spTree>
+      <p:nvGrpSpPr>
+        <p:cNvPr id="1" name=""/>
+        <p:cNvGrpSpPr/>
+        <p:nvPr/>
+      </p:nvGrpSpPr>
+      <p:grpSpPr>
+        <a:xfrm>
+          <a:off x="0" y="0"/>
+          <a:ext cx="0" cy="0"/>
+          <a:chOff x="0" y="0"/>
+          <a:chExt cx="0" cy="0"/>
+        </a:xfrm>
+      </p:grpSpPr>
+      <p:sp>
+        <p:nvSpPr>
+          <p:cNvPr id="2" name="Shape 0"/>
+          <p:cNvSpPr/>
+          <p:nvPr/>
+        </p:nvSpPr>
+        <p:spPr>
+          <a:xfrm>
+            <a:off x="457200" y="384048"/>
+            <a:ext cx="530352" cy="530352"/>
+          </a:xfrm>
+          <a:prstGeom prst="ellipse">
+            <a:avLst/>
+          </a:prstGeom>
+          <a:solidFill>
+            <a:srgbClr val="E35205"/>
+          </a:solidFill>
+          <a:ln/>
+          <a:effectLst>
+            <a:outerShdw sx="100000" sy="100000" kx="0" ky="0" algn="bl" rotWithShape="0" blurRad="76200" dist="25400" dir="5400000">
+              <a:srgbClr val="000000">
+                <a:alpha val="12000"/>
+              </a:srgbClr>
+            </a:outerShdw>
+          </a:effectLst>
+        </p:spPr>
+      </p:sp>
+      <p:pic>
+        <p:nvPicPr>
+          <p:cNvPr id="3" name="Image 0" descr="preencoded.png">    </p:cNvPr>
+          <p:cNvPicPr>
+            <a:picLocks noChangeAspect="1"/>
+          </p:cNvPicPr>
+          <p:nvPr/>
+        </p:nvPicPr>
+        <p:blipFill>
+          <a:blip r:embed="rId1"/>
+          <a:stretch>
+            <a:fillRect/>
+          </a:stretch>
+        </p:blipFill>
+        <p:spPr>
+          <a:xfrm>
+            <a:off x="594360" y="521208"/>
+            <a:ext cx="256032" cy="256032"/>
+          </a:xfrm>
+          <a:prstGeom prst="rect">
+            <a:avLst/>
+          </a:prstGeom>
+        </p:spPr>
+      </p:pic>
+      <p:sp>
+        <p:nvSpPr>
+          <p:cNvPr id="4" name="Text 1"/>
+          <p:cNvSpPr/>
+          <p:nvPr/>
+        </p:nvSpPr>
+        <p:spPr>
+          <a:xfrm>
+            <a:off x="1143000" y="329184"/>
+            <a:ext cx="7498080" cy="603504"/>
+          </a:xfrm>
+          <a:prstGeom prst="rect">
+            <a:avLst/>
+          </a:prstGeom>
+          <a:noFill/>
+          <a:ln/>
+        </p:spPr>
+        <p:txBody>
+          <a:bodyPr wrap="square" lIns="0" tIns="0" rIns="0" bIns="0" rtlCol="0" anchor="ctr"/>
+          <a:lstStyle/>
+          <a:p>
+            <a:pPr indent="0" marL="0">
+              <a:buNone/>
+            </a:pPr>
+            <a:r>
+              <a:rPr lang="en-US" sz="2600" b="1" dirty="0">
+                <a:solidFill>
+                  <a:srgbClr val="1F2937"/>
+                </a:solidFill>
+                <a:latin typeface="Arial" pitchFamily="34" charset="0"/>
+                <a:ea typeface="Arial" pitchFamily="34" charset="-122"/>
+                <a:cs typeface="Arial" pitchFamily="34" charset="-120"/>
+              </a:rPr>
+              <a:t>Key takeaways</a:t>
+            </a:r>
+            <a:endParaRPr lang="en-US" sz="2600" dirty="0"/>
+          </a:p>
+        </p:txBody>
+      </p:sp>
+      <p:sp>
+        <p:nvSpPr>
+          <p:cNvPr id="5" name="Shape 2"/>
+          <p:cNvSpPr/>
+          <p:nvPr/>
+        </p:nvSpPr>
+        <p:spPr>
+          <a:xfrm>
+            <a:off x="457200" y="1325880"/>
+            <a:ext cx="8229600" cy="1207008"/>
+          </a:xfrm>
+          <a:prstGeom prst="roundRect">
+            <a:avLst>
+              <a:gd name="adj" fmla="val 6061"/>
+            </a:avLst>
+          </a:prstGeom>
+          <a:solidFill>
+            <a:srgbClr val="F1F5F9"/>
+          </a:solidFill>
+          <a:ln/>
+          <a:effectLst>
+            <a:outerShdw sx="100000" sy="100000" kx="0" ky="0" algn="bl" rotWithShape="0" blurRad="76200" dist="25400" dir="5400000">
+              <a:srgbClr val="000000">
+                <a:alpha val="12000"/>
+              </a:srgbClr>
+            </a:outerShdw>
+          </a:effectLst>
+        </p:spPr>
+      </p:sp>
+      <p:sp>
+        <p:nvSpPr>
+          <p:cNvPr id="6" name="Text 3"/>
+          <p:cNvSpPr/>
+          <p:nvPr/>
+        </p:nvSpPr>
+        <p:spPr>
+          <a:xfrm>
+            <a:off x="731520" y="1435608"/>
+            <a:ext cx="7680960" cy="987552"/>
+          </a:xfrm>
+          <a:prstGeom prst="rect">
+            <a:avLst/>
+          </a:prstGeom>
+          <a:noFill/>
+          <a:ln/>
+        </p:spPr>
+        <p:txBody>
+          <a:bodyPr wrap="square" lIns="0" tIns="0" rIns="0" bIns="0" rtlCol="0" anchor="t">
+            <a:normAutofit/>
+          </a:bodyPr>
+          <a:lstStyle/>
+          <a:p>
+            <a:pPr marL="342900" indent="-342900">
+              <a:spcAft>
+                <a:spcPts val="600"/>
+              </a:spcAft>
+              <a:buSzPct val="100000"/>
+              <a:buChar char="•"/>
+            </a:pPr>
+            <a:r>
+              <a:rPr lang="en-US" sz="1400" dirty="0">
+                <a:solidFill>
+                  <a:srgbClr val="1F2937"/>
+                </a:solidFill>
+                <a:latin typeface="Calibri" pitchFamily="34" charset="0"/>
+                <a:ea typeface="Calibri" pitchFamily="34" charset="-122"/>
+                <a:cs typeface="Calibri" pitchFamily="34" charset="-120"/>
+              </a:rPr>
+              <a:t>Automate security gates — humans forget, pipelines don't</a:t>
+            </a:r>
+            <a:endParaRPr lang="en-US" sz="1400" dirty="0"/>
+          </a:p>
+          <a:p>
+            <a:pPr marL="342900" indent="-342900">
+              <a:spcAft>
+                <a:spcPts val="600"/>
+              </a:spcAft>
+              <a:buSzPct val="100000"/>
+              <a:buChar char="•"/>
+            </a:pPr>
+            <a:r>
+              <a:rPr lang="en-US" sz="1400" dirty="0">
+                <a:solidFill>
+                  <a:srgbClr val="1F2937"/>
+                </a:solidFill>
+                <a:latin typeface="Calibri" pitchFamily="34" charset="0"/>
+                <a:ea typeface="Calibri" pitchFamily="34" charset="-122"/>
+                <a:cs typeface="Calibri" pitchFamily="34" charset="-120"/>
+              </a:rPr>
+              <a:t>You can't defend what you don't log</a:t>
+            </a:r>
+            <a:endParaRPr lang="en-US" sz="1400" dirty="0"/>
+          </a:p>
+          <a:p>
+            <a:pPr marL="342900" indent="-342900">
+              <a:spcAft>
+                <a:spcPts val="600"/>
+              </a:spcAft>
+              <a:buSzPct val="100000"/>
+              <a:buChar char="•"/>
+            </a:pPr>
+            <a:r>
+              <a:rPr lang="en-US" sz="1400" dirty="0">
+                <a:solidFill>
+                  <a:srgbClr val="1F2937"/>
+                </a:solidFill>
+                <a:latin typeface="Calibri" pitchFamily="34" charset="0"/>
+                <a:ea typeface="Calibri" pitchFamily="34" charset="-122"/>
+                <a:cs typeface="Calibri" pitchFamily="34" charset="-120"/>
+              </a:rPr>
+              <a:t>Fail closed; disclose responsibly</a:t>
+            </a:r>
+            <a:endParaRPr lang="en-US" sz="1400" dirty="0"/>
+          </a:p>
+        </p:txBody>
+      </p:sp>
+      <p:sp>
+        <p:nvSpPr>
+          <p:cNvPr id="7" name="Text 4"/>
+          <p:cNvSpPr/>
+          <p:nvPr/>
+        </p:nvSpPr>
+        <p:spPr>
+          <a:xfrm>
+            <a:off x="457200" y="4800600"/>
+            <a:ext cx="6949440" cy="274320"/>
+          </a:xfrm>
+          <a:prstGeom prst="rect">
+            <a:avLst/>
+          </a:prstGeom>
+          <a:noFill/>
+          <a:ln/>
+        </p:spPr>
+        <p:txBody>
+          <a:bodyPr wrap="square" lIns="0" tIns="0" rIns="0" bIns="0" rtlCol="0" anchor="ctr"/>
+          <a:lstStyle/>
+          <a:p>
+            <a:pPr indent="0" marL="0">
+              <a:buNone/>
+            </a:pPr>
+            <a:r>
+              <a:rPr lang="en-US" sz="900" dirty="0">
+                <a:solidFill>
+                  <a:srgbClr val="64748B"/>
+                </a:solidFill>
+                <a:latin typeface="Calibri" pitchFamily="34" charset="0"/>
+                <a:ea typeface="Calibri" pitchFamily="34" charset="-122"/>
+                <a:cs typeface="Calibri" pitchFamily="34" charset="-120"/>
+              </a:rPr>
+              <a:t>Software Security · Week 15</a:t>
+            </a:r>
+            <a:endParaRPr lang="en-US" sz="900" dirty="0"/>
+          </a:p>
+        </p:txBody>
+      </p:sp>
+      <p:pic>
+        <p:nvPicPr>
+          <p:cNvPr id="8" name="Image 1" descr="/Users/pop7/Library/CloudStorage/OneDrive-MonsterConnectCo.,Ltd/Lecture/KOSEN69 - software-security/slides/pptx/assets/logo-small.png">    </p:cNvPr>
+          <p:cNvPicPr>
+            <a:picLocks noChangeAspect="1"/>
+          </p:cNvPicPr>
+          <p:nvPr/>
+        </p:nvPicPr>
+        <p:blipFill>
+          <a:blip r:embed="rId2"/>
+          <a:stretch>
+            <a:fillRect/>
+          </a:stretch>
+        </p:blipFill>
+        <p:spPr>
+          <a:xfrm>
+            <a:off x="7882128" y="4700016"/>
+            <a:ext cx="768096" cy="356616"/>
+          </a:xfrm>
+          <a:prstGeom prst="rect">
+            <a:avLst/>
+          </a:prstGeom>
+        </p:spPr>
+      </p:pic>
+    </p:spTree>
+  </p:cSld>
+  <p:clrMapOvr>
+    <a:masterClrMapping/>
+  </p:clrMapOvr>
+</p:sld>
+</file>
+
+<file path=ppt/slides/slide17.xml><?xml version="1.0" encoding="utf-8"?>
+<p:sld xmlns:a="http://schemas.openxmlformats.org/drawingml/2006/main" xmlns:r="http://schemas.openxmlformats.org/officeDocument/2006/relationships" xmlns:p="http://schemas.openxmlformats.org/presentationml/2006/main">
+  <p:cSld name="Slide 17">
+    <p:bg>
+      <p:bgPr>
+        <a:solidFill>
+          <a:srgbClr val="FFFFFF"/>
+        </a:solidFill>
+      </p:bgPr>
+    </p:bg>
+    <p:spTree>
+      <p:nvGrpSpPr>
+        <p:cNvPr id="1" name=""/>
+        <p:cNvGrpSpPr/>
+        <p:nvPr/>
+      </p:nvGrpSpPr>
+      <p:grpSpPr>
+        <a:xfrm>
+          <a:off x="0" y="0"/>
+          <a:ext cx="0" cy="0"/>
+          <a:chOff x="0" y="0"/>
+          <a:chExt cx="0" cy="0"/>
+        </a:xfrm>
+      </p:grpSpPr>
+      <p:sp>
+        <p:nvSpPr>
           <p:cNvPr id="2" name="Text 0"/>
           <p:cNvSpPr/>
           <p:nvPr/>
@@ -5164,7 +5889,7 @@
                 <a:ea typeface="Arial" pitchFamily="34" charset="-122"/>
                 <a:cs typeface="Arial" pitchFamily="34" charset="-120"/>
               </a:rPr>
-              <a:t>Platform option — GitHub Advanced Security</a:t>
+              <a:t>A security gate (cont.)</a:t>
             </a:r>
             <a:endParaRPr lang="en-US" sz="2600" dirty="0"/>
           </a:p>
@@ -5172,43 +5897,14 @@
       </p:sp>
       <p:sp>
         <p:nvSpPr>
-          <p:cNvPr id="5" name="Shape 2"/>
-          <p:cNvSpPr/>
-          <p:nvPr/>
-        </p:nvSpPr>
-        <p:spPr>
-          <a:xfrm>
-            <a:off x="457200" y="1325880"/>
-            <a:ext cx="8229600" cy="1517904"/>
-          </a:xfrm>
-          <a:prstGeom prst="roundRect">
-            <a:avLst>
-              <a:gd name="adj" fmla="val 4819"/>
-            </a:avLst>
-          </a:prstGeom>
-          <a:solidFill>
-            <a:srgbClr val="F1F5F9"/>
-          </a:solidFill>
-          <a:ln/>
-          <a:effectLst>
-            <a:outerShdw sx="100000" sy="100000" kx="0" ky="0" algn="bl" rotWithShape="0" blurRad="76200" dist="25400" dir="5400000">
-              <a:srgbClr val="000000">
-                <a:alpha val="12000"/>
-              </a:srgbClr>
-            </a:outerShdw>
-          </a:effectLst>
-        </p:spPr>
-      </p:sp>
-      <p:sp>
-        <p:nvSpPr>
-          <p:cNvPr id="6" name="Text 3"/>
-          <p:cNvSpPr/>
-          <p:nvPr/>
-        </p:nvSpPr>
-        <p:spPr>
-          <a:xfrm>
-            <a:off x="731520" y="1435608"/>
-            <a:ext cx="7680960" cy="1298448"/>
+          <p:cNvPr id="5" name="Text 2"/>
+          <p:cNvSpPr/>
+          <p:nvPr/>
+        </p:nvSpPr>
+        <p:spPr>
+          <a:xfrm>
+            <a:off x="548640" y="1325880"/>
+            <a:ext cx="8046720" cy="548640"/>
           </a:xfrm>
           <a:prstGeom prst="rect">
             <a:avLst/>
@@ -5222,12 +5918,8 @@
           </a:bodyPr>
           <a:lstStyle/>
           <a:p>
-            <a:pPr marL="342900" indent="-342900">
-              <a:spcAft>
-                <a:spcPts val="600"/>
-              </a:spcAft>
-              <a:buSzPct val="100000"/>
-              <a:buChar char="•"/>
+            <a:pPr indent="0" marL="0">
+              <a:buNone/>
             </a:pPr>
             <a:r>
               <a:rPr lang="en-US" sz="1400" dirty="0">
@@ -5238,171 +5930,45 @@
                 <a:ea typeface="Calibri" pitchFamily="34" charset="-122"/>
                 <a:cs typeface="Calibri" pitchFamily="34" charset="-120"/>
               </a:rPr>
-              <a:t>CodeQL code scanning (SAST) on every PR</a:t>
+              <a:t>Try it live: /sim/gate-check (interactive simulation, web only)</a:t>
             </a:r>
             <a:endParaRPr lang="en-US" sz="1400" dirty="0"/>
           </a:p>
-          <a:p>
-            <a:pPr marL="342900" indent="-342900">
-              <a:spcAft>
-                <a:spcPts val="600"/>
-              </a:spcAft>
-              <a:buSzPct val="100000"/>
-              <a:buChar char="•"/>
-            </a:pPr>
-            <a:r>
-              <a:rPr lang="en-US" sz="1400" dirty="0">
-                <a:solidFill>
-                  <a:srgbClr val="1F2937"/>
+        </p:txBody>
+      </p:sp>
+      <p:sp>
+        <p:nvSpPr>
+          <p:cNvPr id="6" name="Text 3"/>
+          <p:cNvSpPr/>
+          <p:nvPr/>
+        </p:nvSpPr>
+        <p:spPr>
+          <a:xfrm>
+            <a:off x="457200" y="4800600"/>
+            <a:ext cx="6949440" cy="274320"/>
+          </a:xfrm>
+          <a:prstGeom prst="rect">
+            <a:avLst/>
+          </a:prstGeom>
+          <a:noFill/>
+          <a:ln/>
+        </p:spPr>
+        <p:txBody>
+          <a:bodyPr wrap="square" lIns="0" tIns="0" rIns="0" bIns="0" rtlCol="0" anchor="ctr"/>
+          <a:lstStyle/>
+          <a:p>
+            <a:pPr indent="0" marL="0">
+              <a:buNone/>
+            </a:pPr>
+            <a:r>
+              <a:rPr lang="en-US" sz="900" dirty="0">
+                <a:solidFill>
+                  <a:srgbClr val="64748B"/>
                 </a:solidFill>
                 <a:latin typeface="Calibri" pitchFamily="34" charset="0"/>
                 <a:ea typeface="Calibri" pitchFamily="34" charset="-122"/>
                 <a:cs typeface="Calibri" pitchFamily="34" charset="-120"/>
               </a:rPr>
-              <a:t>Secret scanning + push protection</a:t>
-            </a:r>
-            <a:endParaRPr lang="en-US" sz="1400" dirty="0"/>
-          </a:p>
-          <a:p>
-            <a:pPr marL="342900" indent="-342900">
-              <a:spcAft>
-                <a:spcPts val="600"/>
-              </a:spcAft>
-              <a:buSzPct val="100000"/>
-              <a:buChar char="•"/>
-            </a:pPr>
-            <a:r>
-              <a:rPr lang="en-US" sz="1400" dirty="0">
-                <a:solidFill>
-                  <a:srgbClr val="1F2937"/>
-                </a:solidFill>
-                <a:latin typeface="Calibri" pitchFamily="34" charset="0"/>
-                <a:ea typeface="Calibri" pitchFamily="34" charset="-122"/>
-                <a:cs typeface="Calibri" pitchFamily="34" charset="-120"/>
-              </a:rPr>
-              <a:t>Dependabot for vulnerable deps</a:t>
-            </a:r>
-            <a:endParaRPr lang="en-US" sz="1400" dirty="0"/>
-          </a:p>
-          <a:p>
-            <a:pPr marL="342900" indent="-342900">
-              <a:spcAft>
-                <a:spcPts val="600"/>
-              </a:spcAft>
-              <a:buSzPct val="100000"/>
-              <a:buChar char="•"/>
-            </a:pPr>
-            <a:r>
-              <a:rPr lang="en-US" sz="1400" dirty="0">
-                <a:solidFill>
-                  <a:srgbClr val="1F2937"/>
-                </a:solidFill>
-                <a:latin typeface="Calibri" pitchFamily="34" charset="0"/>
-                <a:ea typeface="Calibri" pitchFamily="34" charset="-122"/>
-                <a:cs typeface="Calibri" pitchFamily="34" charset="-120"/>
-              </a:rPr>
-              <a:t>SonarQube as a quality/SAST gate alongside</a:t>
-            </a:r>
-            <a:endParaRPr lang="en-US" sz="1400" dirty="0"/>
-          </a:p>
-        </p:txBody>
-      </p:sp>
-      <p:sp>
-        <p:nvSpPr>
-          <p:cNvPr id="7" name="Shape 4"/>
-          <p:cNvSpPr/>
-          <p:nvPr/>
-        </p:nvSpPr>
-        <p:spPr>
-          <a:xfrm>
-            <a:off x="457200" y="3008376"/>
-            <a:ext cx="8229600" cy="822960"/>
-          </a:xfrm>
-          <a:prstGeom prst="roundRect">
-            <a:avLst>
-              <a:gd name="adj" fmla="val 8889"/>
-            </a:avLst>
-          </a:prstGeom>
-          <a:solidFill>
-            <a:srgbClr val="E8EDF3"/>
-          </a:solidFill>
-          <a:ln/>
-        </p:spPr>
-      </p:sp>
-      <p:sp>
-        <p:nvSpPr>
-          <p:cNvPr id="8" name="Text 5"/>
-          <p:cNvSpPr/>
-          <p:nvPr/>
-        </p:nvSpPr>
-        <p:spPr>
-          <a:xfrm>
-            <a:off x="731520" y="3008376"/>
-            <a:ext cx="7680960" cy="822960"/>
-          </a:xfrm>
-          <a:prstGeom prst="rect">
-            <a:avLst/>
-          </a:prstGeom>
-          <a:noFill/>
-          <a:ln/>
-        </p:spPr>
-        <p:txBody>
-          <a:bodyPr wrap="square" lIns="0" tIns="0" rIns="0" bIns="0" rtlCol="0" anchor="ctr">
-            <a:normAutofit/>
-          </a:bodyPr>
-          <a:lstStyle/>
-          <a:p>
-            <a:pPr indent="0" marL="0">
-              <a:buNone/>
-            </a:pPr>
-            <a:r>
-              <a:rPr lang="en-US" sz="1400" i="1" dirty="0">
-                <a:solidFill>
-                  <a:srgbClr val="E35205"/>
-                </a:solidFill>
-                <a:latin typeface="Calibri" pitchFamily="34" charset="0"/>
-                <a:ea typeface="Calibri" pitchFamily="34" charset="-122"/>
-                <a:cs typeface="Calibri" pitchFamily="34" charset="-120"/>
-              </a:rPr>
-              <a:t>Same idea as the YAML gate — managed, in the repo.</a:t>
-            </a:r>
-            <a:endParaRPr lang="en-US" sz="1400" dirty="0"/>
-          </a:p>
-        </p:txBody>
-      </p:sp>
-      <p:sp>
-        <p:nvSpPr>
-          <p:cNvPr id="9" name="Text 6"/>
-          <p:cNvSpPr/>
-          <p:nvPr/>
-        </p:nvSpPr>
-        <p:spPr>
-          <a:xfrm>
-            <a:off x="457200" y="4800600"/>
-            <a:ext cx="6949440" cy="274320"/>
-          </a:xfrm>
-          <a:prstGeom prst="rect">
-            <a:avLst/>
-          </a:prstGeom>
-          <a:noFill/>
-          <a:ln/>
-        </p:spPr>
-        <p:txBody>
-          <a:bodyPr wrap="square" lIns="0" tIns="0" rIns="0" bIns="0" rtlCol="0" anchor="ctr"/>
-          <a:lstStyle/>
-          <a:p>
-            <a:pPr indent="0" marL="0">
-              <a:buNone/>
-            </a:pPr>
-            <a:r>
-              <a:rPr lang="en-US" sz="900" dirty="0">
-                <a:solidFill>
-                  <a:srgbClr val="64748B"/>
-                </a:solidFill>
-                <a:latin typeface="Calibri" pitchFamily="34" charset="0"/>
-                <a:ea typeface="Calibri" pitchFamily="34" charset="-122"/>
-                <a:cs typeface="Calibri" pitchFamily="34" charset="-120"/>
-              </a:rPr>
               <a:t>Software Security · Week 15</a:t>
             </a:r>
             <a:endParaRPr lang="en-US" sz="900" dirty="0"/>
@@ -5411,7 +5977,7 @@
       </p:sp>
       <p:pic>
         <p:nvPicPr>
-          <p:cNvPr id="10" name="Image 1" descr="/Users/pop7/Library/CloudStorage/OneDrive-MonsterConnectCo.,Ltd/Lecture/KOSEN69 - software-security/slides/pptx/assets/logo-small.png">    </p:cNvPr>
+          <p:cNvPr id="7" name="Image 1" descr="/Users/pop7/Library/CloudStorage/OneDrive-MonsterConnectCo.,Ltd/Lecture/KOSEN69 - software-security/slides/pptx/assets/logo-small.png">    </p:cNvPr>
           <p:cNvPicPr>
             <a:picLocks noChangeAspect="1"/>
           </p:cNvPicPr>
@@ -5549,7 +6115,7 @@
                 <a:ea typeface="Arial" pitchFamily="34" charset="-122"/>
                 <a:cs typeface="Arial" pitchFamily="34" charset="-120"/>
               </a:rPr>
-              <a:t>Logging, monitoring, alerting</a:t>
+              <a:t>Platform option — GitHub Advanced Security</a:t>
             </a:r>
             <a:endParaRPr lang="en-US" sz="2600" dirty="0"/>
           </a:p>
@@ -5564,11 +6130,11 @@
         <p:spPr>
           <a:xfrm>
             <a:off x="457200" y="1325880"/>
-            <a:ext cx="8229600" cy="1719072"/>
+            <a:ext cx="8229600" cy="1517904"/>
           </a:xfrm>
           <a:prstGeom prst="roundRect">
             <a:avLst>
-              <a:gd name="adj" fmla="val 4255"/>
+              <a:gd name="adj" fmla="val 4819"/>
             </a:avLst>
           </a:prstGeom>
           <a:solidFill>
@@ -5593,7 +6159,7 @@
         <p:spPr>
           <a:xfrm>
             <a:off x="731520" y="1435608"/>
-            <a:ext cx="7680960" cy="1499616"/>
+            <a:ext cx="7680960" cy="1298448"/>
           </a:xfrm>
           <a:prstGeom prst="rect">
             <a:avLst/>
@@ -5623,7 +6189,7 @@
                 <a:ea typeface="Calibri" pitchFamily="34" charset="-122"/>
                 <a:cs typeface="Calibri" pitchFamily="34" charset="-120"/>
               </a:rPr>
-              <a:t>A09:2025 — without logs you can't detect or respond</a:t>
+              <a:t>CodeQL code scanning (SAST) on every PR</a:t>
             </a:r>
             <a:endParaRPr lang="en-US" sz="1400" dirty="0"/>
           </a:p>
@@ -5644,7 +6210,7 @@
                 <a:ea typeface="Calibri" pitchFamily="34" charset="-122"/>
                 <a:cs typeface="Calibri" pitchFamily="34" charset="-120"/>
               </a:rPr>
-              <a:t>Log security events (authn, authz failures, anomalies)</a:t>
+              <a:t>Secret scanning + push protection</a:t>
             </a:r>
             <a:endParaRPr lang="en-US" sz="1400" dirty="0"/>
           </a:p>
@@ -5665,7 +6231,7 @@
                 <a:ea typeface="Calibri" pitchFamily="34" charset="-122"/>
                 <a:cs typeface="Calibri" pitchFamily="34" charset="-120"/>
               </a:rPr>
-              <a:t>Never log the secret/token value itself (CWE-532) — log reason=bad_token, not the token</a:t>
+              <a:t>Dependabot for vulnerable deps</a:t>
             </a:r>
             <a:endParaRPr lang="en-US" sz="1400" dirty="0"/>
           </a:p>
@@ -5686,7 +6252,7 @@
                 <a:ea typeface="Calibri" pitchFamily="34" charset="-122"/>
                 <a:cs typeface="Calibri" pitchFamily="34" charset="-120"/>
               </a:rPr>
-              <a:t>Alert on suspicious patterns</a:t>
+              <a:t>SonarQube as a quality/SAST gate alongside</a:t>
             </a:r>
             <a:endParaRPr lang="en-US" sz="1400" dirty="0"/>
           </a:p>
@@ -5694,14 +6260,36 @@
       </p:sp>
       <p:sp>
         <p:nvSpPr>
-          <p:cNvPr id="7" name="Text 4"/>
-          <p:cNvSpPr/>
-          <p:nvPr/>
-        </p:nvSpPr>
-        <p:spPr>
-          <a:xfrm>
-            <a:off x="457200" y="4800600"/>
-            <a:ext cx="6949440" cy="274320"/>
+          <p:cNvPr id="7" name="Shape 4"/>
+          <p:cNvSpPr/>
+          <p:nvPr/>
+        </p:nvSpPr>
+        <p:spPr>
+          <a:xfrm>
+            <a:off x="457200" y="3008376"/>
+            <a:ext cx="8229600" cy="822960"/>
+          </a:xfrm>
+          <a:prstGeom prst="roundRect">
+            <a:avLst>
+              <a:gd name="adj" fmla="val 8889"/>
+            </a:avLst>
+          </a:prstGeom>
+          <a:solidFill>
+            <a:srgbClr val="E8EDF3"/>
+          </a:solidFill>
+          <a:ln/>
+        </p:spPr>
+      </p:sp>
+      <p:sp>
+        <p:nvSpPr>
+          <p:cNvPr id="8" name="Text 5"/>
+          <p:cNvSpPr/>
+          <p:nvPr/>
+        </p:nvSpPr>
+        <p:spPr>
+          <a:xfrm>
+            <a:off x="731520" y="3008376"/>
+            <a:ext cx="7680960" cy="822960"/>
           </a:xfrm>
           <a:prstGeom prst="rect">
             <a:avLst/>
@@ -5710,21 +6298,62 @@
           <a:ln/>
         </p:spPr>
         <p:txBody>
-          <a:bodyPr wrap="square" lIns="0" tIns="0" rIns="0" bIns="0" rtlCol="0" anchor="ctr"/>
+          <a:bodyPr wrap="square" lIns="0" tIns="0" rIns="0" bIns="0" rtlCol="0" anchor="ctr">
+            <a:normAutofit/>
+          </a:bodyPr>
           <a:lstStyle/>
           <a:p>
             <a:pPr indent="0" marL="0">
               <a:buNone/>
             </a:pPr>
             <a:r>
-              <a:rPr lang="en-US" sz="900" dirty="0">
-                <a:solidFill>
-                  <a:srgbClr val="64748B"/>
+              <a:rPr lang="en-US" sz="1400" i="1" dirty="0">
+                <a:solidFill>
+                  <a:srgbClr val="E35205"/>
                 </a:solidFill>
                 <a:latin typeface="Calibri" pitchFamily="34" charset="0"/>
                 <a:ea typeface="Calibri" pitchFamily="34" charset="-122"/>
                 <a:cs typeface="Calibri" pitchFamily="34" charset="-120"/>
               </a:rPr>
+              <a:t>Same idea as the YAML gate — managed, in the repo.</a:t>
+            </a:r>
+            <a:endParaRPr lang="en-US" sz="1400" dirty="0"/>
+          </a:p>
+        </p:txBody>
+      </p:sp>
+      <p:sp>
+        <p:nvSpPr>
+          <p:cNvPr id="9" name="Text 6"/>
+          <p:cNvSpPr/>
+          <p:nvPr/>
+        </p:nvSpPr>
+        <p:spPr>
+          <a:xfrm>
+            <a:off x="457200" y="4800600"/>
+            <a:ext cx="6949440" cy="274320"/>
+          </a:xfrm>
+          <a:prstGeom prst="rect">
+            <a:avLst/>
+          </a:prstGeom>
+          <a:noFill/>
+          <a:ln/>
+        </p:spPr>
+        <p:txBody>
+          <a:bodyPr wrap="square" lIns="0" tIns="0" rIns="0" bIns="0" rtlCol="0" anchor="ctr"/>
+          <a:lstStyle/>
+          <a:p>
+            <a:pPr indent="0" marL="0">
+              <a:buNone/>
+            </a:pPr>
+            <a:r>
+              <a:rPr lang="en-US" sz="900" dirty="0">
+                <a:solidFill>
+                  <a:srgbClr val="64748B"/>
+                </a:solidFill>
+                <a:latin typeface="Calibri" pitchFamily="34" charset="0"/>
+                <a:ea typeface="Calibri" pitchFamily="34" charset="-122"/>
+                <a:cs typeface="Calibri" pitchFamily="34" charset="-120"/>
+              </a:rPr>
               <a:t>Software Security · Week 15</a:t>
             </a:r>
             <a:endParaRPr lang="en-US" sz="900" dirty="0"/>
@@ -5733,7 +6362,7 @@
       </p:sp>
       <p:pic>
         <p:nvPicPr>
-          <p:cNvPr id="8" name="Image 1" descr="/Users/pop7/Library/CloudStorage/OneDrive-MonsterConnectCo.,Ltd/Lecture/KOSEN69 - software-security/slides/pptx/assets/logo-small.png">    </p:cNvPr>
+          <p:cNvPr id="10" name="Image 1" descr="/Users/pop7/Library/CloudStorage/OneDrive-MonsterConnectCo.,Ltd/Lecture/KOSEN69 - software-security/slides/pptx/assets/logo-small.png">    </p:cNvPr>
           <p:cNvPicPr>
             <a:picLocks noChangeAspect="1"/>
           </p:cNvPicPr>
@@ -5871,7 +6500,7 @@
                 <a:ea typeface="Arial" pitchFamily="34" charset="-122"/>
                 <a:cs typeface="Arial" pitchFamily="34" charset="-120"/>
               </a:rPr>
-              <a:t>Detection tooling</a:t>
+              <a:t>Logging, monitoring, alerting</a:t>
             </a:r>
             <a:endParaRPr lang="en-US" sz="2600" dirty="0"/>
           </a:p>
@@ -5886,11 +6515,11 @@
         <p:spPr>
           <a:xfrm>
             <a:off x="457200" y="1325880"/>
-            <a:ext cx="8229600" cy="1517904"/>
+            <a:ext cx="8229600" cy="1719072"/>
           </a:xfrm>
           <a:prstGeom prst="roundRect">
             <a:avLst>
-              <a:gd name="adj" fmla="val 4819"/>
+              <a:gd name="adj" fmla="val 4255"/>
             </a:avLst>
           </a:prstGeom>
           <a:solidFill>
@@ -5915,7 +6544,7 @@
         <p:spPr>
           <a:xfrm>
             <a:off x="731520" y="1435608"/>
-            <a:ext cx="7680960" cy="1298448"/>
+            <a:ext cx="7680960" cy="1499616"/>
           </a:xfrm>
           <a:prstGeom prst="rect">
             <a:avLst/>
@@ -5945,7 +6574,7 @@
                 <a:ea typeface="Calibri" pitchFamily="34" charset="-122"/>
                 <a:cs typeface="Calibri" pitchFamily="34" charset="-120"/>
               </a:rPr>
-              <a:t>NIDS — Snort / Suricata (network signatures)</a:t>
+              <a:t>A09:2025 — without logs you can't detect or respond</a:t>
             </a:r>
             <a:endParaRPr lang="en-US" sz="1400" dirty="0"/>
           </a:p>
@@ -5966,7 +6595,7 @@
                 <a:ea typeface="Calibri" pitchFamily="34" charset="-122"/>
                 <a:cs typeface="Calibri" pitchFamily="34" charset="-120"/>
               </a:rPr>
-              <a:t>HIDS — OSSEC (host-based)</a:t>
+              <a:t>Log security events (authn, authz failures, anomalies)</a:t>
             </a:r>
             <a:endParaRPr lang="en-US" sz="1400" dirty="0"/>
           </a:p>
@@ -5987,7 +6616,7 @@
                 <a:ea typeface="Calibri" pitchFamily="34" charset="-122"/>
                 <a:cs typeface="Calibri" pitchFamily="34" charset="-120"/>
               </a:rPr>
-              <a:t>SIEM / stack — Security Onion bundles them + analysis</a:t>
+              <a:t>Never log the secret/token value itself (CWE-532) — log reason=bad_token, not the token</a:t>
             </a:r>
             <a:endParaRPr lang="en-US" sz="1400" dirty="0"/>
           </a:p>
@@ -6008,7 +6637,7 @@
                 <a:ea typeface="Calibri" pitchFamily="34" charset="-122"/>
                 <a:cs typeface="Calibri" pitchFamily="34" charset="-120"/>
               </a:rPr>
-              <a:t>Network visibility: TAP (lossless) vs SPAN (cheap, can drop)</a:t>
+              <a:t>Alert on suspicious patterns</a:t>
             </a:r>
             <a:endParaRPr lang="en-US" sz="1400" dirty="0"/>
           </a:p>
@@ -6193,6 +6822,328 @@
                 <a:ea typeface="Arial" pitchFamily="34" charset="-122"/>
                 <a:cs typeface="Arial" pitchFamily="34" charset="-120"/>
               </a:rPr>
+              <a:t>Detection tooling</a:t>
+            </a:r>
+            <a:endParaRPr lang="en-US" sz="2600" dirty="0"/>
+          </a:p>
+        </p:txBody>
+      </p:sp>
+      <p:sp>
+        <p:nvSpPr>
+          <p:cNvPr id="5" name="Shape 2"/>
+          <p:cNvSpPr/>
+          <p:nvPr/>
+        </p:nvSpPr>
+        <p:spPr>
+          <a:xfrm>
+            <a:off x="457200" y="1325880"/>
+            <a:ext cx="8229600" cy="1517904"/>
+          </a:xfrm>
+          <a:prstGeom prst="roundRect">
+            <a:avLst>
+              <a:gd name="adj" fmla="val 4819"/>
+            </a:avLst>
+          </a:prstGeom>
+          <a:solidFill>
+            <a:srgbClr val="F1F5F9"/>
+          </a:solidFill>
+          <a:ln/>
+          <a:effectLst>
+            <a:outerShdw sx="100000" sy="100000" kx="0" ky="0" algn="bl" rotWithShape="0" blurRad="76200" dist="25400" dir="5400000">
+              <a:srgbClr val="000000">
+                <a:alpha val="12000"/>
+              </a:srgbClr>
+            </a:outerShdw>
+          </a:effectLst>
+        </p:spPr>
+      </p:sp>
+      <p:sp>
+        <p:nvSpPr>
+          <p:cNvPr id="6" name="Text 3"/>
+          <p:cNvSpPr/>
+          <p:nvPr/>
+        </p:nvSpPr>
+        <p:spPr>
+          <a:xfrm>
+            <a:off x="731520" y="1435608"/>
+            <a:ext cx="7680960" cy="1298448"/>
+          </a:xfrm>
+          <a:prstGeom prst="rect">
+            <a:avLst/>
+          </a:prstGeom>
+          <a:noFill/>
+          <a:ln/>
+        </p:spPr>
+        <p:txBody>
+          <a:bodyPr wrap="square" lIns="0" tIns="0" rIns="0" bIns="0" rtlCol="0" anchor="t">
+            <a:normAutofit/>
+          </a:bodyPr>
+          <a:lstStyle/>
+          <a:p>
+            <a:pPr marL="342900" indent="-342900">
+              <a:spcAft>
+                <a:spcPts val="600"/>
+              </a:spcAft>
+              <a:buSzPct val="100000"/>
+              <a:buChar char="•"/>
+            </a:pPr>
+            <a:r>
+              <a:rPr lang="en-US" sz="1400" dirty="0">
+                <a:solidFill>
+                  <a:srgbClr val="1F2937"/>
+                </a:solidFill>
+                <a:latin typeface="Calibri" pitchFamily="34" charset="0"/>
+                <a:ea typeface="Calibri" pitchFamily="34" charset="-122"/>
+                <a:cs typeface="Calibri" pitchFamily="34" charset="-120"/>
+              </a:rPr>
+              <a:t>NIDS — Snort / Suricata (network signatures)</a:t>
+            </a:r>
+            <a:endParaRPr lang="en-US" sz="1400" dirty="0"/>
+          </a:p>
+          <a:p>
+            <a:pPr marL="342900" indent="-342900">
+              <a:spcAft>
+                <a:spcPts val="600"/>
+              </a:spcAft>
+              <a:buSzPct val="100000"/>
+              <a:buChar char="•"/>
+            </a:pPr>
+            <a:r>
+              <a:rPr lang="en-US" sz="1400" dirty="0">
+                <a:solidFill>
+                  <a:srgbClr val="1F2937"/>
+                </a:solidFill>
+                <a:latin typeface="Calibri" pitchFamily="34" charset="0"/>
+                <a:ea typeface="Calibri" pitchFamily="34" charset="-122"/>
+                <a:cs typeface="Calibri" pitchFamily="34" charset="-120"/>
+              </a:rPr>
+              <a:t>HIDS — OSSEC (host-based)</a:t>
+            </a:r>
+            <a:endParaRPr lang="en-US" sz="1400" dirty="0"/>
+          </a:p>
+          <a:p>
+            <a:pPr marL="342900" indent="-342900">
+              <a:spcAft>
+                <a:spcPts val="600"/>
+              </a:spcAft>
+              <a:buSzPct val="100000"/>
+              <a:buChar char="•"/>
+            </a:pPr>
+            <a:r>
+              <a:rPr lang="en-US" sz="1400" dirty="0">
+                <a:solidFill>
+                  <a:srgbClr val="1F2937"/>
+                </a:solidFill>
+                <a:latin typeface="Calibri" pitchFamily="34" charset="0"/>
+                <a:ea typeface="Calibri" pitchFamily="34" charset="-122"/>
+                <a:cs typeface="Calibri" pitchFamily="34" charset="-120"/>
+              </a:rPr>
+              <a:t>SIEM / stack — Security Onion bundles them + analysis</a:t>
+            </a:r>
+            <a:endParaRPr lang="en-US" sz="1400" dirty="0"/>
+          </a:p>
+          <a:p>
+            <a:pPr marL="342900" indent="-342900">
+              <a:spcAft>
+                <a:spcPts val="600"/>
+              </a:spcAft>
+              <a:buSzPct val="100000"/>
+              <a:buChar char="•"/>
+            </a:pPr>
+            <a:r>
+              <a:rPr lang="en-US" sz="1400" dirty="0">
+                <a:solidFill>
+                  <a:srgbClr val="1F2937"/>
+                </a:solidFill>
+                <a:latin typeface="Calibri" pitchFamily="34" charset="0"/>
+                <a:ea typeface="Calibri" pitchFamily="34" charset="-122"/>
+                <a:cs typeface="Calibri" pitchFamily="34" charset="-120"/>
+              </a:rPr>
+              <a:t>Network visibility: TAP (lossless) vs SPAN (cheap, can drop)</a:t>
+            </a:r>
+            <a:endParaRPr lang="en-US" sz="1400" dirty="0"/>
+          </a:p>
+        </p:txBody>
+      </p:sp>
+      <p:sp>
+        <p:nvSpPr>
+          <p:cNvPr id="7" name="Text 4"/>
+          <p:cNvSpPr/>
+          <p:nvPr/>
+        </p:nvSpPr>
+        <p:spPr>
+          <a:xfrm>
+            <a:off x="457200" y="4800600"/>
+            <a:ext cx="6949440" cy="274320"/>
+          </a:xfrm>
+          <a:prstGeom prst="rect">
+            <a:avLst/>
+          </a:prstGeom>
+          <a:noFill/>
+          <a:ln/>
+        </p:spPr>
+        <p:txBody>
+          <a:bodyPr wrap="square" lIns="0" tIns="0" rIns="0" bIns="0" rtlCol="0" anchor="ctr"/>
+          <a:lstStyle/>
+          <a:p>
+            <a:pPr indent="0" marL="0">
+              <a:buNone/>
+            </a:pPr>
+            <a:r>
+              <a:rPr lang="en-US" sz="900" dirty="0">
+                <a:solidFill>
+                  <a:srgbClr val="64748B"/>
+                </a:solidFill>
+                <a:latin typeface="Calibri" pitchFamily="34" charset="0"/>
+                <a:ea typeface="Calibri" pitchFamily="34" charset="-122"/>
+                <a:cs typeface="Calibri" pitchFamily="34" charset="-120"/>
+              </a:rPr>
+              <a:t>Software Security · Week 15</a:t>
+            </a:r>
+            <a:endParaRPr lang="en-US" sz="900" dirty="0"/>
+          </a:p>
+        </p:txBody>
+      </p:sp>
+      <p:pic>
+        <p:nvPicPr>
+          <p:cNvPr id="8" name="Image 1" descr="/Users/pop7/Library/CloudStorage/OneDrive-MonsterConnectCo.,Ltd/Lecture/KOSEN69 - software-security/slides/pptx/assets/logo-small.png">    </p:cNvPr>
+          <p:cNvPicPr>
+            <a:picLocks noChangeAspect="1"/>
+          </p:cNvPicPr>
+          <p:nvPr/>
+        </p:nvPicPr>
+        <p:blipFill>
+          <a:blip r:embed="rId2"/>
+          <a:stretch>
+            <a:fillRect/>
+          </a:stretch>
+        </p:blipFill>
+        <p:spPr>
+          <a:xfrm>
+            <a:off x="7882128" y="4700016"/>
+            <a:ext cx="768096" cy="356616"/>
+          </a:xfrm>
+          <a:prstGeom prst="rect">
+            <a:avLst/>
+          </a:prstGeom>
+        </p:spPr>
+      </p:pic>
+    </p:spTree>
+  </p:cSld>
+  <p:clrMapOvr>
+    <a:masterClrMapping/>
+  </p:clrMapOvr>
+</p:sld>
+</file>
+
+<file path=ppt/slides/slide9.xml><?xml version="1.0" encoding="utf-8"?>
+<p:sld xmlns:a="http://schemas.openxmlformats.org/drawingml/2006/main" xmlns:r="http://schemas.openxmlformats.org/officeDocument/2006/relationships" xmlns:p="http://schemas.openxmlformats.org/presentationml/2006/main">
+  <p:cSld name="Slide 9">
+    <p:bg>
+      <p:bgPr>
+        <a:solidFill>
+          <a:srgbClr val="FFFFFF"/>
+        </a:solidFill>
+      </p:bgPr>
+    </p:bg>
+    <p:spTree>
+      <p:nvGrpSpPr>
+        <p:cNvPr id="1" name=""/>
+        <p:cNvGrpSpPr/>
+        <p:nvPr/>
+      </p:nvGrpSpPr>
+      <p:grpSpPr>
+        <a:xfrm>
+          <a:off x="0" y="0"/>
+          <a:ext cx="0" cy="0"/>
+          <a:chOff x="0" y="0"/>
+          <a:chExt cx="0" cy="0"/>
+        </a:xfrm>
+      </p:grpSpPr>
+      <p:sp>
+        <p:nvSpPr>
+          <p:cNvPr id="2" name="Shape 0"/>
+          <p:cNvSpPr/>
+          <p:nvPr/>
+        </p:nvSpPr>
+        <p:spPr>
+          <a:xfrm>
+            <a:off x="457200" y="384048"/>
+            <a:ext cx="530352" cy="530352"/>
+          </a:xfrm>
+          <a:prstGeom prst="ellipse">
+            <a:avLst/>
+          </a:prstGeom>
+          <a:solidFill>
+            <a:srgbClr val="E35205"/>
+          </a:solidFill>
+          <a:ln/>
+          <a:effectLst>
+            <a:outerShdw sx="100000" sy="100000" kx="0" ky="0" algn="bl" rotWithShape="0" blurRad="76200" dist="25400" dir="5400000">
+              <a:srgbClr val="000000">
+                <a:alpha val="12000"/>
+              </a:srgbClr>
+            </a:outerShdw>
+          </a:effectLst>
+        </p:spPr>
+      </p:sp>
+      <p:pic>
+        <p:nvPicPr>
+          <p:cNvPr id="3" name="Image 0" descr="preencoded.png">    </p:cNvPr>
+          <p:cNvPicPr>
+            <a:picLocks noChangeAspect="1"/>
+          </p:cNvPicPr>
+          <p:nvPr/>
+        </p:nvPicPr>
+        <p:blipFill>
+          <a:blip r:embed="rId1"/>
+          <a:stretch>
+            <a:fillRect/>
+          </a:stretch>
+        </p:blipFill>
+        <p:spPr>
+          <a:xfrm>
+            <a:off x="594360" y="521208"/>
+            <a:ext cx="256032" cy="256032"/>
+          </a:xfrm>
+          <a:prstGeom prst="rect">
+            <a:avLst/>
+          </a:prstGeom>
+        </p:spPr>
+      </p:pic>
+      <p:sp>
+        <p:nvSpPr>
+          <p:cNvPr id="4" name="Text 1"/>
+          <p:cNvSpPr/>
+          <p:nvPr/>
+        </p:nvSpPr>
+        <p:spPr>
+          <a:xfrm>
+            <a:off x="1143000" y="329184"/>
+            <a:ext cx="7498080" cy="603504"/>
+          </a:xfrm>
+          <a:prstGeom prst="rect">
+            <a:avLst/>
+          </a:prstGeom>
+          <a:noFill/>
+          <a:ln/>
+        </p:spPr>
+        <p:txBody>
+          <a:bodyPr wrap="square" lIns="0" tIns="0" rIns="0" bIns="0" rtlCol="0" anchor="ctr"/>
+          <a:lstStyle/>
+          <a:p>
+            <a:pPr indent="0" marL="0">
+              <a:buNone/>
+            </a:pPr>
+            <a:r>
+              <a:rPr lang="en-US" sz="2600" b="1" dirty="0">
+                <a:solidFill>
+                  <a:srgbClr val="1F2937"/>
+                </a:solidFill>
+                <a:latin typeface="Arial" pitchFamily="34" charset="0"/>
+                <a:ea typeface="Arial" pitchFamily="34" charset="-122"/>
+                <a:cs typeface="Arial" pitchFamily="34" charset="-120"/>
+              </a:rPr>
               <a:t>Alerts — the confusion matrix</a:t>
             </a:r>
             <a:endParaRPr lang="en-US" sz="2600" dirty="0"/>
@@ -6201,7 +7152,7 @@
       </p:sp>
       <p:graphicFrame>
         <p:nvGraphicFramePr>
-          <p:cNvPr id="9" name="Table 0"/>
+          <p:cNvPr id="10" name="Table 0"/>
           <p:cNvGraphicFramePr>
             <a:graphicFrameLocks noGrp="1"/>
           </p:cNvGraphicFramePr>
@@ -6943,327 +7894,6 @@
 </p:sld>
 </file>
 
-<file path=ppt/slides/slide9.xml><?xml version="1.0" encoding="utf-8"?>
-<p:sld xmlns:a="http://schemas.openxmlformats.org/drawingml/2006/main" xmlns:r="http://schemas.openxmlformats.org/officeDocument/2006/relationships" xmlns:p="http://schemas.openxmlformats.org/presentationml/2006/main">
-  <p:cSld name="Slide 9">
-    <p:bg>
-      <p:bgPr>
-        <a:solidFill>
-          <a:srgbClr val="FFFFFF"/>
-        </a:solidFill>
-      </p:bgPr>
-    </p:bg>
-    <p:spTree>
-      <p:nvGrpSpPr>
-        <p:cNvPr id="1" name=""/>
-        <p:cNvGrpSpPr/>
-        <p:nvPr/>
-      </p:nvGrpSpPr>
-      <p:grpSpPr>
-        <a:xfrm>
-          <a:off x="0" y="0"/>
-          <a:ext cx="0" cy="0"/>
-          <a:chOff x="0" y="0"/>
-          <a:chExt cx="0" cy="0"/>
-        </a:xfrm>
-      </p:grpSpPr>
-      <p:sp>
-        <p:nvSpPr>
-          <p:cNvPr id="2" name="Shape 0"/>
-          <p:cNvSpPr/>
-          <p:nvPr/>
-        </p:nvSpPr>
-        <p:spPr>
-          <a:xfrm>
-            <a:off x="457200" y="384048"/>
-            <a:ext cx="530352" cy="530352"/>
-          </a:xfrm>
-          <a:prstGeom prst="ellipse">
-            <a:avLst/>
-          </a:prstGeom>
-          <a:solidFill>
-            <a:srgbClr val="E35205"/>
-          </a:solidFill>
-          <a:ln/>
-          <a:effectLst>
-            <a:outerShdw sx="100000" sy="100000" kx="0" ky="0" algn="bl" rotWithShape="0" blurRad="76200" dist="25400" dir="5400000">
-              <a:srgbClr val="000000">
-                <a:alpha val="12000"/>
-              </a:srgbClr>
-            </a:outerShdw>
-          </a:effectLst>
-        </p:spPr>
-      </p:sp>
-      <p:pic>
-        <p:nvPicPr>
-          <p:cNvPr id="3" name="Image 0" descr="preencoded.png">    </p:cNvPr>
-          <p:cNvPicPr>
-            <a:picLocks noChangeAspect="1"/>
-          </p:cNvPicPr>
-          <p:nvPr/>
-        </p:nvPicPr>
-        <p:blipFill>
-          <a:blip r:embed="rId1"/>
-          <a:stretch>
-            <a:fillRect/>
-          </a:stretch>
-        </p:blipFill>
-        <p:spPr>
-          <a:xfrm>
-            <a:off x="594360" y="521208"/>
-            <a:ext cx="256032" cy="256032"/>
-          </a:xfrm>
-          <a:prstGeom prst="rect">
-            <a:avLst/>
-          </a:prstGeom>
-        </p:spPr>
-      </p:pic>
-      <p:sp>
-        <p:nvSpPr>
-          <p:cNvPr id="4" name="Text 1"/>
-          <p:cNvSpPr/>
-          <p:nvPr/>
-        </p:nvSpPr>
-        <p:spPr>
-          <a:xfrm>
-            <a:off x="1143000" y="329184"/>
-            <a:ext cx="7498080" cy="603504"/>
-          </a:xfrm>
-          <a:prstGeom prst="rect">
-            <a:avLst/>
-          </a:prstGeom>
-          <a:noFill/>
-          <a:ln/>
-        </p:spPr>
-        <p:txBody>
-          <a:bodyPr wrap="square" lIns="0" tIns="0" rIns="0" bIns="0" rtlCol="0" anchor="ctr"/>
-          <a:lstStyle/>
-          <a:p>
-            <a:pPr indent="0" marL="0">
-              <a:buNone/>
-            </a:pPr>
-            <a:r>
-              <a:rPr lang="en-US" sz="2600" b="1" dirty="0">
-                <a:solidFill>
-                  <a:srgbClr val="1F2937"/>
-                </a:solidFill>
-                <a:latin typeface="Arial" pitchFamily="34" charset="0"/>
-                <a:ea typeface="Arial" pitchFamily="34" charset="-122"/>
-                <a:cs typeface="Arial" pitchFamily="34" charset="-120"/>
-              </a:rPr>
-              <a:t>When something happens (NIST SP 800-86)</a:t>
-            </a:r>
-            <a:endParaRPr lang="en-US" sz="2600" dirty="0"/>
-          </a:p>
-        </p:txBody>
-      </p:sp>
-      <p:sp>
-        <p:nvSpPr>
-          <p:cNvPr id="5" name="Text 2"/>
-          <p:cNvSpPr/>
-          <p:nvPr/>
-        </p:nvSpPr>
-        <p:spPr>
-          <a:xfrm>
-            <a:off x="548640" y="1325880"/>
-            <a:ext cx="8046720" cy="548640"/>
-          </a:xfrm>
-          <a:prstGeom prst="rect">
-            <a:avLst/>
-          </a:prstGeom>
-          <a:noFill/>
-          <a:ln/>
-        </p:spPr>
-        <p:txBody>
-          <a:bodyPr wrap="square" lIns="0" tIns="0" rIns="0" bIns="0" rtlCol="0" anchor="t">
-            <a:normAutofit/>
-          </a:bodyPr>
-          <a:lstStyle/>
-          <a:p>
-            <a:pPr indent="0" marL="0">
-              <a:buNone/>
-            </a:pPr>
-            <a:r>
-              <a:rPr lang="en-US" sz="1400" dirty="0">
-                <a:solidFill>
-                  <a:srgbClr val="1F2937"/>
-                </a:solidFill>
-                <a:latin typeface="Calibri" pitchFamily="34" charset="0"/>
-                <a:ea typeface="Calibri" pitchFamily="34" charset="-122"/>
-                <a:cs typeface="Calibri" pitchFamily="34" charset="-120"/>
-              </a:rPr>
-              <a:t>Collection → Examination → Analysis → Reporting</a:t>
-            </a:r>
-            <a:endParaRPr lang="en-US" sz="1400" dirty="0"/>
-          </a:p>
-        </p:txBody>
-      </p:sp>
-      <p:sp>
-        <p:nvSpPr>
-          <p:cNvPr id="6" name="Shape 3"/>
-          <p:cNvSpPr/>
-          <p:nvPr/>
-        </p:nvSpPr>
-        <p:spPr>
-          <a:xfrm>
-            <a:off x="457200" y="1965960"/>
-            <a:ext cx="8229600" cy="896112"/>
-          </a:xfrm>
-          <a:prstGeom prst="roundRect">
-            <a:avLst>
-              <a:gd name="adj" fmla="val 8163"/>
-            </a:avLst>
-          </a:prstGeom>
-          <a:solidFill>
-            <a:srgbClr val="F1F5F9"/>
-          </a:solidFill>
-          <a:ln/>
-          <a:effectLst>
-            <a:outerShdw sx="100000" sy="100000" kx="0" ky="0" algn="bl" rotWithShape="0" blurRad="76200" dist="25400" dir="5400000">
-              <a:srgbClr val="000000">
-                <a:alpha val="12000"/>
-              </a:srgbClr>
-            </a:outerShdw>
-          </a:effectLst>
-        </p:spPr>
-      </p:sp>
-      <p:sp>
-        <p:nvSpPr>
-          <p:cNvPr id="7" name="Text 4"/>
-          <p:cNvSpPr/>
-          <p:nvPr/>
-        </p:nvSpPr>
-        <p:spPr>
-          <a:xfrm>
-            <a:off x="731520" y="2075688"/>
-            <a:ext cx="7680960" cy="676656"/>
-          </a:xfrm>
-          <a:prstGeom prst="rect">
-            <a:avLst/>
-          </a:prstGeom>
-          <a:noFill/>
-          <a:ln/>
-        </p:spPr>
-        <p:txBody>
-          <a:bodyPr wrap="square" lIns="0" tIns="0" rIns="0" bIns="0" rtlCol="0" anchor="t">
-            <a:normAutofit/>
-          </a:bodyPr>
-          <a:lstStyle/>
-          <a:p>
-            <a:pPr marL="342900" indent="-342900">
-              <a:spcAft>
-                <a:spcPts val="600"/>
-              </a:spcAft>
-              <a:buSzPct val="100000"/>
-              <a:buChar char="•"/>
-            </a:pPr>
-            <a:r>
-              <a:rPr lang="en-US" sz="1400" dirty="0">
-                <a:solidFill>
-                  <a:srgbClr val="1F2937"/>
-                </a:solidFill>
-                <a:latin typeface="Calibri" pitchFamily="34" charset="0"/>
-                <a:ea typeface="Calibri" pitchFamily="34" charset="-122"/>
-                <a:cs typeface="Calibri" pitchFamily="34" charset="-120"/>
-              </a:rPr>
-              <a:t>Preserve order of volatility: memory → temp files → disk → logs</a:t>
-            </a:r>
-            <a:endParaRPr lang="en-US" sz="1400" dirty="0"/>
-          </a:p>
-          <a:p>
-            <a:pPr marL="342900" indent="-342900">
-              <a:spcAft>
-                <a:spcPts val="600"/>
-              </a:spcAft>
-              <a:buSzPct val="100000"/>
-              <a:buChar char="•"/>
-            </a:pPr>
-            <a:r>
-              <a:rPr lang="en-US" sz="1400" dirty="0">
-                <a:solidFill>
-                  <a:srgbClr val="1F2937"/>
-                </a:solidFill>
-                <a:latin typeface="Calibri" pitchFamily="34" charset="0"/>
-                <a:ea typeface="Calibri" pitchFamily="34" charset="-122"/>
-                <a:cs typeface="Calibri" pitchFamily="34" charset="-120"/>
-              </a:rPr>
-              <a:t>Failed/success logins: Windows Event 4625 / 4624</a:t>
-            </a:r>
-            <a:endParaRPr lang="en-US" sz="1400" dirty="0"/>
-          </a:p>
-        </p:txBody>
-      </p:sp>
-      <p:sp>
-        <p:nvSpPr>
-          <p:cNvPr id="8" name="Text 5"/>
-          <p:cNvSpPr/>
-          <p:nvPr/>
-        </p:nvSpPr>
-        <p:spPr>
-          <a:xfrm>
-            <a:off x="457200" y="4800600"/>
-            <a:ext cx="6949440" cy="274320"/>
-          </a:xfrm>
-          <a:prstGeom prst="rect">
-            <a:avLst/>
-          </a:prstGeom>
-          <a:noFill/>
-          <a:ln/>
-        </p:spPr>
-        <p:txBody>
-          <a:bodyPr wrap="square" lIns="0" tIns="0" rIns="0" bIns="0" rtlCol="0" anchor="ctr"/>
-          <a:lstStyle/>
-          <a:p>
-            <a:pPr indent="0" marL="0">
-              <a:buNone/>
-            </a:pPr>
-            <a:r>
-              <a:rPr lang="en-US" sz="900" dirty="0">
-                <a:solidFill>
-                  <a:srgbClr val="64748B"/>
-                </a:solidFill>
-                <a:latin typeface="Calibri" pitchFamily="34" charset="0"/>
-                <a:ea typeface="Calibri" pitchFamily="34" charset="-122"/>
-                <a:cs typeface="Calibri" pitchFamily="34" charset="-120"/>
-              </a:rPr>
-              <a:t>Software Security · Week 15</a:t>
-            </a:r>
-            <a:endParaRPr lang="en-US" sz="900" dirty="0"/>
-          </a:p>
-        </p:txBody>
-      </p:sp>
-      <p:pic>
-        <p:nvPicPr>
-          <p:cNvPr id="9" name="Image 1" descr="/Users/pop7/Library/CloudStorage/OneDrive-MonsterConnectCo.,Ltd/Lecture/KOSEN69 - software-security/slides/pptx/assets/logo-small.png">    </p:cNvPr>
-          <p:cNvPicPr>
-            <a:picLocks noChangeAspect="1"/>
-          </p:cNvPicPr>
-          <p:nvPr/>
-        </p:nvPicPr>
-        <p:blipFill>
-          <a:blip r:embed="rId2"/>
-          <a:stretch>
-            <a:fillRect/>
-          </a:stretch>
-        </p:blipFill>
-        <p:spPr>
-          <a:xfrm>
-            <a:off x="7882128" y="4700016"/>
-            <a:ext cx="768096" cy="356616"/>
-          </a:xfrm>
-          <a:prstGeom prst="rect">
-            <a:avLst/>
-          </a:prstGeom>
-        </p:spPr>
-      </p:pic>
-    </p:spTree>
-  </p:cSld>
-  <p:clrMapOvr>
-    <a:masterClrMapping/>
-  </p:clrMapOvr>
-</p:sld>
-</file>
-
 <file path=ppt/theme/theme1.xml><?xml version="1.0" encoding="utf-8"?>
 <a:theme xmlns:a="http://schemas.openxmlformats.org/drawingml/2006/main" name="Office Theme">
   <a:themeElements>
